--- a/gakkyu/tegami/pptx/T1.pptx
+++ b/gakkyu/tegami/pptx/T1.pptx
@@ -3622,6 +3622,7 @@
               <a:srgbClr val="6AA7A7"/>
             </a:solidFill>
           </a:ln>
+          <a:effectLst/>
         </p:spPr>
         <p:style>
           <a:lnRef idx="2">
@@ -3630,7 +3631,7 @@
           <a:fillRef idx="0">
             <a:schemeClr val="accent1"/>
           </a:fillRef>
-          <a:effectRef idx="1">
+          <a:effectRef idx="0">
             <a:schemeClr val="accent1"/>
           </a:effectRef>
           <a:fontRef idx="minor">
@@ -3681,7 +3682,7 @@
             <a:fillRef idx="3">
               <a:schemeClr val="accent1"/>
             </a:fillRef>
-            <a:effectRef idx="2">
+            <a:effectRef idx="0">
               <a:schemeClr val="accent1"/>
             </a:effectRef>
             <a:fontRef idx="minor">
@@ -3715,15 +3716,16 @@
                 <a:srgbClr val="8FBFBF"/>
               </a:solidFill>
             </a:ln>
-          </p:spPr>
-          <p:style>
-            <a:lnRef idx="2">
-              <a:schemeClr val="accent1"/>
-            </a:lnRef>
-            <a:fillRef idx="0">
-              <a:schemeClr val="accent1"/>
-            </a:fillRef>
-            <a:effectRef idx="1">
+            <a:effectLst/>
+          </p:spPr>
+          <p:style>
+            <a:lnRef idx="2">
+              <a:schemeClr val="accent1"/>
+            </a:lnRef>
+            <a:fillRef idx="0">
+              <a:schemeClr val="accent1"/>
+            </a:fillRef>
+            <a:effectRef idx="0">
               <a:schemeClr val="accent1"/>
             </a:effectRef>
             <a:fontRef idx="minor">
@@ -3750,15 +3752,16 @@
                 <a:srgbClr val="8FBFBF"/>
               </a:solidFill>
             </a:ln>
-          </p:spPr>
-          <p:style>
-            <a:lnRef idx="2">
-              <a:schemeClr val="accent1"/>
-            </a:lnRef>
-            <a:fillRef idx="0">
-              <a:schemeClr val="accent1"/>
-            </a:fillRef>
-            <a:effectRef idx="1">
+            <a:effectLst/>
+          </p:spPr>
+          <p:style>
+            <a:lnRef idx="2">
+              <a:schemeClr val="accent1"/>
+            </a:lnRef>
+            <a:fillRef idx="0">
+              <a:schemeClr val="accent1"/>
+            </a:fillRef>
+            <a:effectRef idx="0">
               <a:schemeClr val="accent1"/>
             </a:effectRef>
             <a:fontRef idx="minor">
@@ -3785,15 +3788,16 @@
                 <a:srgbClr val="8FBFBF"/>
               </a:solidFill>
             </a:ln>
-          </p:spPr>
-          <p:style>
-            <a:lnRef idx="2">
-              <a:schemeClr val="accent1"/>
-            </a:lnRef>
-            <a:fillRef idx="0">
-              <a:schemeClr val="accent1"/>
-            </a:fillRef>
-            <a:effectRef idx="1">
+            <a:effectLst/>
+          </p:spPr>
+          <p:style>
+            <a:lnRef idx="2">
+              <a:schemeClr val="accent1"/>
+            </a:lnRef>
+            <a:fillRef idx="0">
+              <a:schemeClr val="accent1"/>
+            </a:fillRef>
+            <a:effectRef idx="0">
               <a:schemeClr val="accent1"/>
             </a:effectRef>
             <a:fontRef idx="minor">
@@ -3820,15 +3824,16 @@
                 <a:srgbClr val="8FBFBF"/>
               </a:solidFill>
             </a:ln>
-          </p:spPr>
-          <p:style>
-            <a:lnRef idx="2">
-              <a:schemeClr val="accent1"/>
-            </a:lnRef>
-            <a:fillRef idx="0">
-              <a:schemeClr val="accent1"/>
-            </a:fillRef>
-            <a:effectRef idx="1">
+            <a:effectLst/>
+          </p:spPr>
+          <p:style>
+            <a:lnRef idx="2">
+              <a:schemeClr val="accent1"/>
+            </a:lnRef>
+            <a:fillRef idx="0">
+              <a:schemeClr val="accent1"/>
+            </a:fillRef>
+            <a:effectRef idx="0">
               <a:schemeClr val="accent1"/>
             </a:effectRef>
             <a:fontRef idx="minor">
@@ -3855,15 +3860,16 @@
                 <a:srgbClr val="8FBFBF"/>
               </a:solidFill>
             </a:ln>
-          </p:spPr>
-          <p:style>
-            <a:lnRef idx="2">
-              <a:schemeClr val="accent1"/>
-            </a:lnRef>
-            <a:fillRef idx="0">
-              <a:schemeClr val="accent1"/>
-            </a:fillRef>
-            <a:effectRef idx="1">
+            <a:effectLst/>
+          </p:spPr>
+          <p:style>
+            <a:lnRef idx="2">
+              <a:schemeClr val="accent1"/>
+            </a:lnRef>
+            <a:fillRef idx="0">
+              <a:schemeClr val="accent1"/>
+            </a:fillRef>
+            <a:effectRef idx="0">
               <a:schemeClr val="accent1"/>
             </a:effectRef>
             <a:fontRef idx="minor">
@@ -3890,15 +3896,16 @@
                 <a:srgbClr val="8FBFBF"/>
               </a:solidFill>
             </a:ln>
-          </p:spPr>
-          <p:style>
-            <a:lnRef idx="2">
-              <a:schemeClr val="accent1"/>
-            </a:lnRef>
-            <a:fillRef idx="0">
-              <a:schemeClr val="accent1"/>
-            </a:fillRef>
-            <a:effectRef idx="1">
+            <a:effectLst/>
+          </p:spPr>
+          <p:style>
+            <a:lnRef idx="2">
+              <a:schemeClr val="accent1"/>
+            </a:lnRef>
+            <a:fillRef idx="0">
+              <a:schemeClr val="accent1"/>
+            </a:fillRef>
+            <a:effectRef idx="0">
               <a:schemeClr val="accent1"/>
             </a:effectRef>
             <a:fontRef idx="minor">
@@ -3925,15 +3932,16 @@
                 <a:srgbClr val="8FBFBF"/>
               </a:solidFill>
             </a:ln>
-          </p:spPr>
-          <p:style>
-            <a:lnRef idx="2">
-              <a:schemeClr val="accent1"/>
-            </a:lnRef>
-            <a:fillRef idx="0">
-              <a:schemeClr val="accent1"/>
-            </a:fillRef>
-            <a:effectRef idx="1">
+            <a:effectLst/>
+          </p:spPr>
+          <p:style>
+            <a:lnRef idx="2">
+              <a:schemeClr val="accent1"/>
+            </a:lnRef>
+            <a:fillRef idx="0">
+              <a:schemeClr val="accent1"/>
+            </a:fillRef>
+            <a:effectRef idx="0">
               <a:schemeClr val="accent1"/>
             </a:effectRef>
             <a:fontRef idx="minor">
@@ -3960,15 +3968,16 @@
                 <a:srgbClr val="8FBFBF"/>
               </a:solidFill>
             </a:ln>
-          </p:spPr>
-          <p:style>
-            <a:lnRef idx="2">
-              <a:schemeClr val="accent1"/>
-            </a:lnRef>
-            <a:fillRef idx="0">
-              <a:schemeClr val="accent1"/>
-            </a:fillRef>
-            <a:effectRef idx="1">
+            <a:effectLst/>
+          </p:spPr>
+          <p:style>
+            <a:lnRef idx="2">
+              <a:schemeClr val="accent1"/>
+            </a:lnRef>
+            <a:fillRef idx="0">
+              <a:schemeClr val="accent1"/>
+            </a:fillRef>
+            <a:effectRef idx="0">
               <a:schemeClr val="accent1"/>
             </a:effectRef>
             <a:fontRef idx="minor">
@@ -3995,15 +4004,16 @@
                 <a:srgbClr val="8FBFBF"/>
               </a:solidFill>
             </a:ln>
-          </p:spPr>
-          <p:style>
-            <a:lnRef idx="2">
-              <a:schemeClr val="accent1"/>
-            </a:lnRef>
-            <a:fillRef idx="0">
-              <a:schemeClr val="accent1"/>
-            </a:fillRef>
-            <a:effectRef idx="1">
+            <a:effectLst/>
+          </p:spPr>
+          <p:style>
+            <a:lnRef idx="2">
+              <a:schemeClr val="accent1"/>
+            </a:lnRef>
+            <a:fillRef idx="0">
+              <a:schemeClr val="accent1"/>
+            </a:fillRef>
+            <a:effectRef idx="0">
               <a:schemeClr val="accent1"/>
             </a:effectRef>
             <a:fontRef idx="minor">
@@ -4030,15 +4040,16 @@
                 <a:srgbClr val="8FBFBF"/>
               </a:solidFill>
             </a:ln>
-          </p:spPr>
-          <p:style>
-            <a:lnRef idx="2">
-              <a:schemeClr val="accent1"/>
-            </a:lnRef>
-            <a:fillRef idx="0">
-              <a:schemeClr val="accent1"/>
-            </a:fillRef>
-            <a:effectRef idx="1">
+            <a:effectLst/>
+          </p:spPr>
+          <p:style>
+            <a:lnRef idx="2">
+              <a:schemeClr val="accent1"/>
+            </a:lnRef>
+            <a:fillRef idx="0">
+              <a:schemeClr val="accent1"/>
+            </a:fillRef>
+            <a:effectRef idx="0">
               <a:schemeClr val="accent1"/>
             </a:effectRef>
             <a:fontRef idx="minor">
@@ -4065,15 +4076,16 @@
                 <a:srgbClr val="8FBFBF"/>
               </a:solidFill>
             </a:ln>
-          </p:spPr>
-          <p:style>
-            <a:lnRef idx="2">
-              <a:schemeClr val="accent1"/>
-            </a:lnRef>
-            <a:fillRef idx="0">
-              <a:schemeClr val="accent1"/>
-            </a:fillRef>
-            <a:effectRef idx="1">
+            <a:effectLst/>
+          </p:spPr>
+          <p:style>
+            <a:lnRef idx="2">
+              <a:schemeClr val="accent1"/>
+            </a:lnRef>
+            <a:fillRef idx="0">
+              <a:schemeClr val="accent1"/>
+            </a:fillRef>
+            <a:effectRef idx="0">
               <a:schemeClr val="accent1"/>
             </a:effectRef>
             <a:fontRef idx="minor">
@@ -4125,7 +4137,7 @@
             <a:fillRef idx="3">
               <a:schemeClr val="accent1"/>
             </a:fillRef>
-            <a:effectRef idx="2">
+            <a:effectRef idx="0">
               <a:schemeClr val="accent1"/>
             </a:effectRef>
             <a:fontRef idx="minor">
@@ -4159,15 +4171,16 @@
                 <a:srgbClr val="8FBFBF"/>
               </a:solidFill>
             </a:ln>
-          </p:spPr>
-          <p:style>
-            <a:lnRef idx="2">
-              <a:schemeClr val="accent1"/>
-            </a:lnRef>
-            <a:fillRef idx="0">
-              <a:schemeClr val="accent1"/>
-            </a:fillRef>
-            <a:effectRef idx="1">
+            <a:effectLst/>
+          </p:spPr>
+          <p:style>
+            <a:lnRef idx="2">
+              <a:schemeClr val="accent1"/>
+            </a:lnRef>
+            <a:fillRef idx="0">
+              <a:schemeClr val="accent1"/>
+            </a:fillRef>
+            <a:effectRef idx="0">
               <a:schemeClr val="accent1"/>
             </a:effectRef>
             <a:fontRef idx="minor">
@@ -4194,15 +4207,16 @@
                 <a:srgbClr val="8FBFBF"/>
               </a:solidFill>
             </a:ln>
-          </p:spPr>
-          <p:style>
-            <a:lnRef idx="2">
-              <a:schemeClr val="accent1"/>
-            </a:lnRef>
-            <a:fillRef idx="0">
-              <a:schemeClr val="accent1"/>
-            </a:fillRef>
-            <a:effectRef idx="1">
+            <a:effectLst/>
+          </p:spPr>
+          <p:style>
+            <a:lnRef idx="2">
+              <a:schemeClr val="accent1"/>
+            </a:lnRef>
+            <a:fillRef idx="0">
+              <a:schemeClr val="accent1"/>
+            </a:fillRef>
+            <a:effectRef idx="0">
               <a:schemeClr val="accent1"/>
             </a:effectRef>
             <a:fontRef idx="minor">
@@ -4229,15 +4243,16 @@
                 <a:srgbClr val="8FBFBF"/>
               </a:solidFill>
             </a:ln>
-          </p:spPr>
-          <p:style>
-            <a:lnRef idx="2">
-              <a:schemeClr val="accent1"/>
-            </a:lnRef>
-            <a:fillRef idx="0">
-              <a:schemeClr val="accent1"/>
-            </a:fillRef>
-            <a:effectRef idx="1">
+            <a:effectLst/>
+          </p:spPr>
+          <p:style>
+            <a:lnRef idx="2">
+              <a:schemeClr val="accent1"/>
+            </a:lnRef>
+            <a:fillRef idx="0">
+              <a:schemeClr val="accent1"/>
+            </a:fillRef>
+            <a:effectRef idx="0">
               <a:schemeClr val="accent1"/>
             </a:effectRef>
             <a:fontRef idx="minor">
@@ -4264,15 +4279,16 @@
                 <a:srgbClr val="8FBFBF"/>
               </a:solidFill>
             </a:ln>
-          </p:spPr>
-          <p:style>
-            <a:lnRef idx="2">
-              <a:schemeClr val="accent1"/>
-            </a:lnRef>
-            <a:fillRef idx="0">
-              <a:schemeClr val="accent1"/>
-            </a:fillRef>
-            <a:effectRef idx="1">
+            <a:effectLst/>
+          </p:spPr>
+          <p:style>
+            <a:lnRef idx="2">
+              <a:schemeClr val="accent1"/>
+            </a:lnRef>
+            <a:fillRef idx="0">
+              <a:schemeClr val="accent1"/>
+            </a:fillRef>
+            <a:effectRef idx="0">
               <a:schemeClr val="accent1"/>
             </a:effectRef>
             <a:fontRef idx="minor">
@@ -4299,15 +4315,16 @@
                 <a:srgbClr val="8FBFBF"/>
               </a:solidFill>
             </a:ln>
-          </p:spPr>
-          <p:style>
-            <a:lnRef idx="2">
-              <a:schemeClr val="accent1"/>
-            </a:lnRef>
-            <a:fillRef idx="0">
-              <a:schemeClr val="accent1"/>
-            </a:fillRef>
-            <a:effectRef idx="1">
+            <a:effectLst/>
+          </p:spPr>
+          <p:style>
+            <a:lnRef idx="2">
+              <a:schemeClr val="accent1"/>
+            </a:lnRef>
+            <a:fillRef idx="0">
+              <a:schemeClr val="accent1"/>
+            </a:fillRef>
+            <a:effectRef idx="0">
               <a:schemeClr val="accent1"/>
             </a:effectRef>
             <a:fontRef idx="minor">
@@ -4334,15 +4351,16 @@
                 <a:srgbClr val="8FBFBF"/>
               </a:solidFill>
             </a:ln>
-          </p:spPr>
-          <p:style>
-            <a:lnRef idx="2">
-              <a:schemeClr val="accent1"/>
-            </a:lnRef>
-            <a:fillRef idx="0">
-              <a:schemeClr val="accent1"/>
-            </a:fillRef>
-            <a:effectRef idx="1">
+            <a:effectLst/>
+          </p:spPr>
+          <p:style>
+            <a:lnRef idx="2">
+              <a:schemeClr val="accent1"/>
+            </a:lnRef>
+            <a:fillRef idx="0">
+              <a:schemeClr val="accent1"/>
+            </a:fillRef>
+            <a:effectRef idx="0">
               <a:schemeClr val="accent1"/>
             </a:effectRef>
             <a:fontRef idx="minor">
@@ -4369,15 +4387,16 @@
                 <a:srgbClr val="8FBFBF"/>
               </a:solidFill>
             </a:ln>
-          </p:spPr>
-          <p:style>
-            <a:lnRef idx="2">
-              <a:schemeClr val="accent1"/>
-            </a:lnRef>
-            <a:fillRef idx="0">
-              <a:schemeClr val="accent1"/>
-            </a:fillRef>
-            <a:effectRef idx="1">
+            <a:effectLst/>
+          </p:spPr>
+          <p:style>
+            <a:lnRef idx="2">
+              <a:schemeClr val="accent1"/>
+            </a:lnRef>
+            <a:fillRef idx="0">
+              <a:schemeClr val="accent1"/>
+            </a:fillRef>
+            <a:effectRef idx="0">
               <a:schemeClr val="accent1"/>
             </a:effectRef>
             <a:fontRef idx="minor">
@@ -4404,15 +4423,16 @@
                 <a:srgbClr val="8FBFBF"/>
               </a:solidFill>
             </a:ln>
-          </p:spPr>
-          <p:style>
-            <a:lnRef idx="2">
-              <a:schemeClr val="accent1"/>
-            </a:lnRef>
-            <a:fillRef idx="0">
-              <a:schemeClr val="accent1"/>
-            </a:fillRef>
-            <a:effectRef idx="1">
+            <a:effectLst/>
+          </p:spPr>
+          <p:style>
+            <a:lnRef idx="2">
+              <a:schemeClr val="accent1"/>
+            </a:lnRef>
+            <a:fillRef idx="0">
+              <a:schemeClr val="accent1"/>
+            </a:fillRef>
+            <a:effectRef idx="0">
               <a:schemeClr val="accent1"/>
             </a:effectRef>
             <a:fontRef idx="minor">
@@ -4439,15 +4459,16 @@
                 <a:srgbClr val="8FBFBF"/>
               </a:solidFill>
             </a:ln>
-          </p:spPr>
-          <p:style>
-            <a:lnRef idx="2">
-              <a:schemeClr val="accent1"/>
-            </a:lnRef>
-            <a:fillRef idx="0">
-              <a:schemeClr val="accent1"/>
-            </a:fillRef>
-            <a:effectRef idx="1">
+            <a:effectLst/>
+          </p:spPr>
+          <p:style>
+            <a:lnRef idx="2">
+              <a:schemeClr val="accent1"/>
+            </a:lnRef>
+            <a:fillRef idx="0">
+              <a:schemeClr val="accent1"/>
+            </a:fillRef>
+            <a:effectRef idx="0">
               <a:schemeClr val="accent1"/>
             </a:effectRef>
             <a:fontRef idx="minor">
@@ -4474,15 +4495,16 @@
                 <a:srgbClr val="8FBFBF"/>
               </a:solidFill>
             </a:ln>
-          </p:spPr>
-          <p:style>
-            <a:lnRef idx="2">
-              <a:schemeClr val="accent1"/>
-            </a:lnRef>
-            <a:fillRef idx="0">
-              <a:schemeClr val="accent1"/>
-            </a:fillRef>
-            <a:effectRef idx="1">
+            <a:effectLst/>
+          </p:spPr>
+          <p:style>
+            <a:lnRef idx="2">
+              <a:schemeClr val="accent1"/>
+            </a:lnRef>
+            <a:fillRef idx="0">
+              <a:schemeClr val="accent1"/>
+            </a:fillRef>
+            <a:effectRef idx="0">
               <a:schemeClr val="accent1"/>
             </a:effectRef>
             <a:fontRef idx="minor">
@@ -4509,15 +4531,16 @@
                 <a:srgbClr val="8FBFBF"/>
               </a:solidFill>
             </a:ln>
-          </p:spPr>
-          <p:style>
-            <a:lnRef idx="2">
-              <a:schemeClr val="accent1"/>
-            </a:lnRef>
-            <a:fillRef idx="0">
-              <a:schemeClr val="accent1"/>
-            </a:fillRef>
-            <a:effectRef idx="1">
+            <a:effectLst/>
+          </p:spPr>
+          <p:style>
+            <a:lnRef idx="2">
+              <a:schemeClr val="accent1"/>
+            </a:lnRef>
+            <a:fillRef idx="0">
+              <a:schemeClr val="accent1"/>
+            </a:fillRef>
+            <a:effectRef idx="0">
               <a:schemeClr val="accent1"/>
             </a:effectRef>
             <a:fontRef idx="minor">
@@ -4569,7 +4592,7 @@
             <a:fillRef idx="3">
               <a:schemeClr val="accent1"/>
             </a:fillRef>
-            <a:effectRef idx="2">
+            <a:effectRef idx="0">
               <a:schemeClr val="accent1"/>
             </a:effectRef>
             <a:fontRef idx="minor">
@@ -4603,15 +4626,16 @@
                 <a:srgbClr val="8FBFBF"/>
               </a:solidFill>
             </a:ln>
-          </p:spPr>
-          <p:style>
-            <a:lnRef idx="2">
-              <a:schemeClr val="accent1"/>
-            </a:lnRef>
-            <a:fillRef idx="0">
-              <a:schemeClr val="accent1"/>
-            </a:fillRef>
-            <a:effectRef idx="1">
+            <a:effectLst/>
+          </p:spPr>
+          <p:style>
+            <a:lnRef idx="2">
+              <a:schemeClr val="accent1"/>
+            </a:lnRef>
+            <a:fillRef idx="0">
+              <a:schemeClr val="accent1"/>
+            </a:fillRef>
+            <a:effectRef idx="0">
               <a:schemeClr val="accent1"/>
             </a:effectRef>
             <a:fontRef idx="minor">
@@ -4638,15 +4662,16 @@
                 <a:srgbClr val="8FBFBF"/>
               </a:solidFill>
             </a:ln>
-          </p:spPr>
-          <p:style>
-            <a:lnRef idx="2">
-              <a:schemeClr val="accent1"/>
-            </a:lnRef>
-            <a:fillRef idx="0">
-              <a:schemeClr val="accent1"/>
-            </a:fillRef>
-            <a:effectRef idx="1">
+            <a:effectLst/>
+          </p:spPr>
+          <p:style>
+            <a:lnRef idx="2">
+              <a:schemeClr val="accent1"/>
+            </a:lnRef>
+            <a:fillRef idx="0">
+              <a:schemeClr val="accent1"/>
+            </a:fillRef>
+            <a:effectRef idx="0">
               <a:schemeClr val="accent1"/>
             </a:effectRef>
             <a:fontRef idx="minor">
@@ -4673,15 +4698,16 @@
                 <a:srgbClr val="8FBFBF"/>
               </a:solidFill>
             </a:ln>
-          </p:spPr>
-          <p:style>
-            <a:lnRef idx="2">
-              <a:schemeClr val="accent1"/>
-            </a:lnRef>
-            <a:fillRef idx="0">
-              <a:schemeClr val="accent1"/>
-            </a:fillRef>
-            <a:effectRef idx="1">
+            <a:effectLst/>
+          </p:spPr>
+          <p:style>
+            <a:lnRef idx="2">
+              <a:schemeClr val="accent1"/>
+            </a:lnRef>
+            <a:fillRef idx="0">
+              <a:schemeClr val="accent1"/>
+            </a:fillRef>
+            <a:effectRef idx="0">
               <a:schemeClr val="accent1"/>
             </a:effectRef>
             <a:fontRef idx="minor">
@@ -4708,15 +4734,16 @@
                 <a:srgbClr val="8FBFBF"/>
               </a:solidFill>
             </a:ln>
-          </p:spPr>
-          <p:style>
-            <a:lnRef idx="2">
-              <a:schemeClr val="accent1"/>
-            </a:lnRef>
-            <a:fillRef idx="0">
-              <a:schemeClr val="accent1"/>
-            </a:fillRef>
-            <a:effectRef idx="1">
+            <a:effectLst/>
+          </p:spPr>
+          <p:style>
+            <a:lnRef idx="2">
+              <a:schemeClr val="accent1"/>
+            </a:lnRef>
+            <a:fillRef idx="0">
+              <a:schemeClr val="accent1"/>
+            </a:fillRef>
+            <a:effectRef idx="0">
               <a:schemeClr val="accent1"/>
             </a:effectRef>
             <a:fontRef idx="minor">
@@ -4743,15 +4770,16 @@
                 <a:srgbClr val="8FBFBF"/>
               </a:solidFill>
             </a:ln>
-          </p:spPr>
-          <p:style>
-            <a:lnRef idx="2">
-              <a:schemeClr val="accent1"/>
-            </a:lnRef>
-            <a:fillRef idx="0">
-              <a:schemeClr val="accent1"/>
-            </a:fillRef>
-            <a:effectRef idx="1">
+            <a:effectLst/>
+          </p:spPr>
+          <p:style>
+            <a:lnRef idx="2">
+              <a:schemeClr val="accent1"/>
+            </a:lnRef>
+            <a:fillRef idx="0">
+              <a:schemeClr val="accent1"/>
+            </a:fillRef>
+            <a:effectRef idx="0">
               <a:schemeClr val="accent1"/>
             </a:effectRef>
             <a:fontRef idx="minor">
@@ -4778,15 +4806,16 @@
                 <a:srgbClr val="8FBFBF"/>
               </a:solidFill>
             </a:ln>
-          </p:spPr>
-          <p:style>
-            <a:lnRef idx="2">
-              <a:schemeClr val="accent1"/>
-            </a:lnRef>
-            <a:fillRef idx="0">
-              <a:schemeClr val="accent1"/>
-            </a:fillRef>
-            <a:effectRef idx="1">
+            <a:effectLst/>
+          </p:spPr>
+          <p:style>
+            <a:lnRef idx="2">
+              <a:schemeClr val="accent1"/>
+            </a:lnRef>
+            <a:fillRef idx="0">
+              <a:schemeClr val="accent1"/>
+            </a:fillRef>
+            <a:effectRef idx="0">
               <a:schemeClr val="accent1"/>
             </a:effectRef>
             <a:fontRef idx="minor">
@@ -4813,15 +4842,16 @@
                 <a:srgbClr val="8FBFBF"/>
               </a:solidFill>
             </a:ln>
-          </p:spPr>
-          <p:style>
-            <a:lnRef idx="2">
-              <a:schemeClr val="accent1"/>
-            </a:lnRef>
-            <a:fillRef idx="0">
-              <a:schemeClr val="accent1"/>
-            </a:fillRef>
-            <a:effectRef idx="1">
+            <a:effectLst/>
+          </p:spPr>
+          <p:style>
+            <a:lnRef idx="2">
+              <a:schemeClr val="accent1"/>
+            </a:lnRef>
+            <a:fillRef idx="0">
+              <a:schemeClr val="accent1"/>
+            </a:fillRef>
+            <a:effectRef idx="0">
               <a:schemeClr val="accent1"/>
             </a:effectRef>
             <a:fontRef idx="minor">
@@ -4848,15 +4878,16 @@
                 <a:srgbClr val="8FBFBF"/>
               </a:solidFill>
             </a:ln>
-          </p:spPr>
-          <p:style>
-            <a:lnRef idx="2">
-              <a:schemeClr val="accent1"/>
-            </a:lnRef>
-            <a:fillRef idx="0">
-              <a:schemeClr val="accent1"/>
-            </a:fillRef>
-            <a:effectRef idx="1">
+            <a:effectLst/>
+          </p:spPr>
+          <p:style>
+            <a:lnRef idx="2">
+              <a:schemeClr val="accent1"/>
+            </a:lnRef>
+            <a:fillRef idx="0">
+              <a:schemeClr val="accent1"/>
+            </a:fillRef>
+            <a:effectRef idx="0">
               <a:schemeClr val="accent1"/>
             </a:effectRef>
             <a:fontRef idx="minor">
@@ -4883,15 +4914,16 @@
                 <a:srgbClr val="8FBFBF"/>
               </a:solidFill>
             </a:ln>
-          </p:spPr>
-          <p:style>
-            <a:lnRef idx="2">
-              <a:schemeClr val="accent1"/>
-            </a:lnRef>
-            <a:fillRef idx="0">
-              <a:schemeClr val="accent1"/>
-            </a:fillRef>
-            <a:effectRef idx="1">
+            <a:effectLst/>
+          </p:spPr>
+          <p:style>
+            <a:lnRef idx="2">
+              <a:schemeClr val="accent1"/>
+            </a:lnRef>
+            <a:fillRef idx="0">
+              <a:schemeClr val="accent1"/>
+            </a:fillRef>
+            <a:effectRef idx="0">
               <a:schemeClr val="accent1"/>
             </a:effectRef>
             <a:fontRef idx="minor">
@@ -4918,15 +4950,16 @@
                 <a:srgbClr val="8FBFBF"/>
               </a:solidFill>
             </a:ln>
-          </p:spPr>
-          <p:style>
-            <a:lnRef idx="2">
-              <a:schemeClr val="accent1"/>
-            </a:lnRef>
-            <a:fillRef idx="0">
-              <a:schemeClr val="accent1"/>
-            </a:fillRef>
-            <a:effectRef idx="1">
+            <a:effectLst/>
+          </p:spPr>
+          <p:style>
+            <a:lnRef idx="2">
+              <a:schemeClr val="accent1"/>
+            </a:lnRef>
+            <a:fillRef idx="0">
+              <a:schemeClr val="accent1"/>
+            </a:fillRef>
+            <a:effectRef idx="0">
               <a:schemeClr val="accent1"/>
             </a:effectRef>
             <a:fontRef idx="minor">
@@ -4953,15 +4986,16 @@
                 <a:srgbClr val="8FBFBF"/>
               </a:solidFill>
             </a:ln>
-          </p:spPr>
-          <p:style>
-            <a:lnRef idx="2">
-              <a:schemeClr val="accent1"/>
-            </a:lnRef>
-            <a:fillRef idx="0">
-              <a:schemeClr val="accent1"/>
-            </a:fillRef>
-            <a:effectRef idx="1">
+            <a:effectLst/>
+          </p:spPr>
+          <p:style>
+            <a:lnRef idx="2">
+              <a:schemeClr val="accent1"/>
+            </a:lnRef>
+            <a:fillRef idx="0">
+              <a:schemeClr val="accent1"/>
+            </a:fillRef>
+            <a:effectRef idx="0">
               <a:schemeClr val="accent1"/>
             </a:effectRef>
             <a:fontRef idx="minor">
@@ -5013,7 +5047,7 @@
             <a:fillRef idx="3">
               <a:schemeClr val="accent1"/>
             </a:fillRef>
-            <a:effectRef idx="2">
+            <a:effectRef idx="0">
               <a:schemeClr val="accent1"/>
             </a:effectRef>
             <a:fontRef idx="minor">
@@ -5047,15 +5081,16 @@
                 <a:srgbClr val="8FBFBF"/>
               </a:solidFill>
             </a:ln>
-          </p:spPr>
-          <p:style>
-            <a:lnRef idx="2">
-              <a:schemeClr val="accent1"/>
-            </a:lnRef>
-            <a:fillRef idx="0">
-              <a:schemeClr val="accent1"/>
-            </a:fillRef>
-            <a:effectRef idx="1">
+            <a:effectLst/>
+          </p:spPr>
+          <p:style>
+            <a:lnRef idx="2">
+              <a:schemeClr val="accent1"/>
+            </a:lnRef>
+            <a:fillRef idx="0">
+              <a:schemeClr val="accent1"/>
+            </a:fillRef>
+            <a:effectRef idx="0">
               <a:schemeClr val="accent1"/>
             </a:effectRef>
             <a:fontRef idx="minor">
@@ -5082,15 +5117,16 @@
                 <a:srgbClr val="8FBFBF"/>
               </a:solidFill>
             </a:ln>
-          </p:spPr>
-          <p:style>
-            <a:lnRef idx="2">
-              <a:schemeClr val="accent1"/>
-            </a:lnRef>
-            <a:fillRef idx="0">
-              <a:schemeClr val="accent1"/>
-            </a:fillRef>
-            <a:effectRef idx="1">
+            <a:effectLst/>
+          </p:spPr>
+          <p:style>
+            <a:lnRef idx="2">
+              <a:schemeClr val="accent1"/>
+            </a:lnRef>
+            <a:fillRef idx="0">
+              <a:schemeClr val="accent1"/>
+            </a:fillRef>
+            <a:effectRef idx="0">
               <a:schemeClr val="accent1"/>
             </a:effectRef>
             <a:fontRef idx="minor">
@@ -5117,15 +5153,16 @@
                 <a:srgbClr val="8FBFBF"/>
               </a:solidFill>
             </a:ln>
-          </p:spPr>
-          <p:style>
-            <a:lnRef idx="2">
-              <a:schemeClr val="accent1"/>
-            </a:lnRef>
-            <a:fillRef idx="0">
-              <a:schemeClr val="accent1"/>
-            </a:fillRef>
-            <a:effectRef idx="1">
+            <a:effectLst/>
+          </p:spPr>
+          <p:style>
+            <a:lnRef idx="2">
+              <a:schemeClr val="accent1"/>
+            </a:lnRef>
+            <a:fillRef idx="0">
+              <a:schemeClr val="accent1"/>
+            </a:fillRef>
+            <a:effectRef idx="0">
               <a:schemeClr val="accent1"/>
             </a:effectRef>
             <a:fontRef idx="minor">
@@ -5152,15 +5189,16 @@
                 <a:srgbClr val="8FBFBF"/>
               </a:solidFill>
             </a:ln>
-          </p:spPr>
-          <p:style>
-            <a:lnRef idx="2">
-              <a:schemeClr val="accent1"/>
-            </a:lnRef>
-            <a:fillRef idx="0">
-              <a:schemeClr val="accent1"/>
-            </a:fillRef>
-            <a:effectRef idx="1">
+            <a:effectLst/>
+          </p:spPr>
+          <p:style>
+            <a:lnRef idx="2">
+              <a:schemeClr val="accent1"/>
+            </a:lnRef>
+            <a:fillRef idx="0">
+              <a:schemeClr val="accent1"/>
+            </a:fillRef>
+            <a:effectRef idx="0">
               <a:schemeClr val="accent1"/>
             </a:effectRef>
             <a:fontRef idx="minor">
@@ -5187,15 +5225,16 @@
                 <a:srgbClr val="8FBFBF"/>
               </a:solidFill>
             </a:ln>
-          </p:spPr>
-          <p:style>
-            <a:lnRef idx="2">
-              <a:schemeClr val="accent1"/>
-            </a:lnRef>
-            <a:fillRef idx="0">
-              <a:schemeClr val="accent1"/>
-            </a:fillRef>
-            <a:effectRef idx="1">
+            <a:effectLst/>
+          </p:spPr>
+          <p:style>
+            <a:lnRef idx="2">
+              <a:schemeClr val="accent1"/>
+            </a:lnRef>
+            <a:fillRef idx="0">
+              <a:schemeClr val="accent1"/>
+            </a:fillRef>
+            <a:effectRef idx="0">
               <a:schemeClr val="accent1"/>
             </a:effectRef>
             <a:fontRef idx="minor">
@@ -5222,15 +5261,16 @@
                 <a:srgbClr val="8FBFBF"/>
               </a:solidFill>
             </a:ln>
-          </p:spPr>
-          <p:style>
-            <a:lnRef idx="2">
-              <a:schemeClr val="accent1"/>
-            </a:lnRef>
-            <a:fillRef idx="0">
-              <a:schemeClr val="accent1"/>
-            </a:fillRef>
-            <a:effectRef idx="1">
+            <a:effectLst/>
+          </p:spPr>
+          <p:style>
+            <a:lnRef idx="2">
+              <a:schemeClr val="accent1"/>
+            </a:lnRef>
+            <a:fillRef idx="0">
+              <a:schemeClr val="accent1"/>
+            </a:fillRef>
+            <a:effectRef idx="0">
               <a:schemeClr val="accent1"/>
             </a:effectRef>
             <a:fontRef idx="minor">
@@ -5257,15 +5297,16 @@
                 <a:srgbClr val="8FBFBF"/>
               </a:solidFill>
             </a:ln>
-          </p:spPr>
-          <p:style>
-            <a:lnRef idx="2">
-              <a:schemeClr val="accent1"/>
-            </a:lnRef>
-            <a:fillRef idx="0">
-              <a:schemeClr val="accent1"/>
-            </a:fillRef>
-            <a:effectRef idx="1">
+            <a:effectLst/>
+          </p:spPr>
+          <p:style>
+            <a:lnRef idx="2">
+              <a:schemeClr val="accent1"/>
+            </a:lnRef>
+            <a:fillRef idx="0">
+              <a:schemeClr val="accent1"/>
+            </a:fillRef>
+            <a:effectRef idx="0">
               <a:schemeClr val="accent1"/>
             </a:effectRef>
             <a:fontRef idx="minor">
@@ -5292,15 +5333,16 @@
                 <a:srgbClr val="8FBFBF"/>
               </a:solidFill>
             </a:ln>
-          </p:spPr>
-          <p:style>
-            <a:lnRef idx="2">
-              <a:schemeClr val="accent1"/>
-            </a:lnRef>
-            <a:fillRef idx="0">
-              <a:schemeClr val="accent1"/>
-            </a:fillRef>
-            <a:effectRef idx="1">
+            <a:effectLst/>
+          </p:spPr>
+          <p:style>
+            <a:lnRef idx="2">
+              <a:schemeClr val="accent1"/>
+            </a:lnRef>
+            <a:fillRef idx="0">
+              <a:schemeClr val="accent1"/>
+            </a:fillRef>
+            <a:effectRef idx="0">
               <a:schemeClr val="accent1"/>
             </a:effectRef>
             <a:fontRef idx="minor">
@@ -5327,15 +5369,16 @@
                 <a:srgbClr val="8FBFBF"/>
               </a:solidFill>
             </a:ln>
-          </p:spPr>
-          <p:style>
-            <a:lnRef idx="2">
-              <a:schemeClr val="accent1"/>
-            </a:lnRef>
-            <a:fillRef idx="0">
-              <a:schemeClr val="accent1"/>
-            </a:fillRef>
-            <a:effectRef idx="1">
+            <a:effectLst/>
+          </p:spPr>
+          <p:style>
+            <a:lnRef idx="2">
+              <a:schemeClr val="accent1"/>
+            </a:lnRef>
+            <a:fillRef idx="0">
+              <a:schemeClr val="accent1"/>
+            </a:fillRef>
+            <a:effectRef idx="0">
               <a:schemeClr val="accent1"/>
             </a:effectRef>
             <a:fontRef idx="minor">
@@ -5362,15 +5405,16 @@
                 <a:srgbClr val="8FBFBF"/>
               </a:solidFill>
             </a:ln>
-          </p:spPr>
-          <p:style>
-            <a:lnRef idx="2">
-              <a:schemeClr val="accent1"/>
-            </a:lnRef>
-            <a:fillRef idx="0">
-              <a:schemeClr val="accent1"/>
-            </a:fillRef>
-            <a:effectRef idx="1">
+            <a:effectLst/>
+          </p:spPr>
+          <p:style>
+            <a:lnRef idx="2">
+              <a:schemeClr val="accent1"/>
+            </a:lnRef>
+            <a:fillRef idx="0">
+              <a:schemeClr val="accent1"/>
+            </a:fillRef>
+            <a:effectRef idx="0">
               <a:schemeClr val="accent1"/>
             </a:effectRef>
             <a:fontRef idx="minor">
@@ -5397,15 +5441,16 @@
                 <a:srgbClr val="8FBFBF"/>
               </a:solidFill>
             </a:ln>
-          </p:spPr>
-          <p:style>
-            <a:lnRef idx="2">
-              <a:schemeClr val="accent1"/>
-            </a:lnRef>
-            <a:fillRef idx="0">
-              <a:schemeClr val="accent1"/>
-            </a:fillRef>
-            <a:effectRef idx="1">
+            <a:effectLst/>
+          </p:spPr>
+          <p:style>
+            <a:lnRef idx="2">
+              <a:schemeClr val="accent1"/>
+            </a:lnRef>
+            <a:fillRef idx="0">
+              <a:schemeClr val="accent1"/>
+            </a:fillRef>
+            <a:effectRef idx="0">
               <a:schemeClr val="accent1"/>
             </a:effectRef>
             <a:fontRef idx="minor">
@@ -5457,7 +5502,7 @@
             <a:fillRef idx="3">
               <a:schemeClr val="accent1"/>
             </a:fillRef>
-            <a:effectRef idx="2">
+            <a:effectRef idx="0">
               <a:schemeClr val="accent1"/>
             </a:effectRef>
             <a:fontRef idx="minor">
@@ -5491,15 +5536,16 @@
                 <a:srgbClr val="8FBFBF"/>
               </a:solidFill>
             </a:ln>
-          </p:spPr>
-          <p:style>
-            <a:lnRef idx="2">
-              <a:schemeClr val="accent1"/>
-            </a:lnRef>
-            <a:fillRef idx="0">
-              <a:schemeClr val="accent1"/>
-            </a:fillRef>
-            <a:effectRef idx="1">
+            <a:effectLst/>
+          </p:spPr>
+          <p:style>
+            <a:lnRef idx="2">
+              <a:schemeClr val="accent1"/>
+            </a:lnRef>
+            <a:fillRef idx="0">
+              <a:schemeClr val="accent1"/>
+            </a:fillRef>
+            <a:effectRef idx="0">
               <a:schemeClr val="accent1"/>
             </a:effectRef>
             <a:fontRef idx="minor">
@@ -5526,15 +5572,16 @@
                 <a:srgbClr val="8FBFBF"/>
               </a:solidFill>
             </a:ln>
-          </p:spPr>
-          <p:style>
-            <a:lnRef idx="2">
-              <a:schemeClr val="accent1"/>
-            </a:lnRef>
-            <a:fillRef idx="0">
-              <a:schemeClr val="accent1"/>
-            </a:fillRef>
-            <a:effectRef idx="1">
+            <a:effectLst/>
+          </p:spPr>
+          <p:style>
+            <a:lnRef idx="2">
+              <a:schemeClr val="accent1"/>
+            </a:lnRef>
+            <a:fillRef idx="0">
+              <a:schemeClr val="accent1"/>
+            </a:fillRef>
+            <a:effectRef idx="0">
               <a:schemeClr val="accent1"/>
             </a:effectRef>
             <a:fontRef idx="minor">
@@ -5561,15 +5608,16 @@
                 <a:srgbClr val="8FBFBF"/>
               </a:solidFill>
             </a:ln>
-          </p:spPr>
-          <p:style>
-            <a:lnRef idx="2">
-              <a:schemeClr val="accent1"/>
-            </a:lnRef>
-            <a:fillRef idx="0">
-              <a:schemeClr val="accent1"/>
-            </a:fillRef>
-            <a:effectRef idx="1">
+            <a:effectLst/>
+          </p:spPr>
+          <p:style>
+            <a:lnRef idx="2">
+              <a:schemeClr val="accent1"/>
+            </a:lnRef>
+            <a:fillRef idx="0">
+              <a:schemeClr val="accent1"/>
+            </a:fillRef>
+            <a:effectRef idx="0">
               <a:schemeClr val="accent1"/>
             </a:effectRef>
             <a:fontRef idx="minor">
@@ -5596,15 +5644,16 @@
                 <a:srgbClr val="8FBFBF"/>
               </a:solidFill>
             </a:ln>
-          </p:spPr>
-          <p:style>
-            <a:lnRef idx="2">
-              <a:schemeClr val="accent1"/>
-            </a:lnRef>
-            <a:fillRef idx="0">
-              <a:schemeClr val="accent1"/>
-            </a:fillRef>
-            <a:effectRef idx="1">
+            <a:effectLst/>
+          </p:spPr>
+          <p:style>
+            <a:lnRef idx="2">
+              <a:schemeClr val="accent1"/>
+            </a:lnRef>
+            <a:fillRef idx="0">
+              <a:schemeClr val="accent1"/>
+            </a:fillRef>
+            <a:effectRef idx="0">
               <a:schemeClr val="accent1"/>
             </a:effectRef>
             <a:fontRef idx="minor">
@@ -5631,15 +5680,16 @@
                 <a:srgbClr val="8FBFBF"/>
               </a:solidFill>
             </a:ln>
-          </p:spPr>
-          <p:style>
-            <a:lnRef idx="2">
-              <a:schemeClr val="accent1"/>
-            </a:lnRef>
-            <a:fillRef idx="0">
-              <a:schemeClr val="accent1"/>
-            </a:fillRef>
-            <a:effectRef idx="1">
+            <a:effectLst/>
+          </p:spPr>
+          <p:style>
+            <a:lnRef idx="2">
+              <a:schemeClr val="accent1"/>
+            </a:lnRef>
+            <a:fillRef idx="0">
+              <a:schemeClr val="accent1"/>
+            </a:fillRef>
+            <a:effectRef idx="0">
               <a:schemeClr val="accent1"/>
             </a:effectRef>
             <a:fontRef idx="minor">
@@ -5666,15 +5716,16 @@
                 <a:srgbClr val="8FBFBF"/>
               </a:solidFill>
             </a:ln>
-          </p:spPr>
-          <p:style>
-            <a:lnRef idx="2">
-              <a:schemeClr val="accent1"/>
-            </a:lnRef>
-            <a:fillRef idx="0">
-              <a:schemeClr val="accent1"/>
-            </a:fillRef>
-            <a:effectRef idx="1">
+            <a:effectLst/>
+          </p:spPr>
+          <p:style>
+            <a:lnRef idx="2">
+              <a:schemeClr val="accent1"/>
+            </a:lnRef>
+            <a:fillRef idx="0">
+              <a:schemeClr val="accent1"/>
+            </a:fillRef>
+            <a:effectRef idx="0">
               <a:schemeClr val="accent1"/>
             </a:effectRef>
             <a:fontRef idx="minor">
@@ -5701,15 +5752,16 @@
                 <a:srgbClr val="8FBFBF"/>
               </a:solidFill>
             </a:ln>
-          </p:spPr>
-          <p:style>
-            <a:lnRef idx="2">
-              <a:schemeClr val="accent1"/>
-            </a:lnRef>
-            <a:fillRef idx="0">
-              <a:schemeClr val="accent1"/>
-            </a:fillRef>
-            <a:effectRef idx="1">
+            <a:effectLst/>
+          </p:spPr>
+          <p:style>
+            <a:lnRef idx="2">
+              <a:schemeClr val="accent1"/>
+            </a:lnRef>
+            <a:fillRef idx="0">
+              <a:schemeClr val="accent1"/>
+            </a:fillRef>
+            <a:effectRef idx="0">
               <a:schemeClr val="accent1"/>
             </a:effectRef>
             <a:fontRef idx="minor">
@@ -5736,15 +5788,16 @@
                 <a:srgbClr val="8FBFBF"/>
               </a:solidFill>
             </a:ln>
-          </p:spPr>
-          <p:style>
-            <a:lnRef idx="2">
-              <a:schemeClr val="accent1"/>
-            </a:lnRef>
-            <a:fillRef idx="0">
-              <a:schemeClr val="accent1"/>
-            </a:fillRef>
-            <a:effectRef idx="1">
+            <a:effectLst/>
+          </p:spPr>
+          <p:style>
+            <a:lnRef idx="2">
+              <a:schemeClr val="accent1"/>
+            </a:lnRef>
+            <a:fillRef idx="0">
+              <a:schemeClr val="accent1"/>
+            </a:fillRef>
+            <a:effectRef idx="0">
               <a:schemeClr val="accent1"/>
             </a:effectRef>
             <a:fontRef idx="minor">
@@ -5771,15 +5824,16 @@
                 <a:srgbClr val="8FBFBF"/>
               </a:solidFill>
             </a:ln>
-          </p:spPr>
-          <p:style>
-            <a:lnRef idx="2">
-              <a:schemeClr val="accent1"/>
-            </a:lnRef>
-            <a:fillRef idx="0">
-              <a:schemeClr val="accent1"/>
-            </a:fillRef>
-            <a:effectRef idx="1">
+            <a:effectLst/>
+          </p:spPr>
+          <p:style>
+            <a:lnRef idx="2">
+              <a:schemeClr val="accent1"/>
+            </a:lnRef>
+            <a:fillRef idx="0">
+              <a:schemeClr val="accent1"/>
+            </a:fillRef>
+            <a:effectRef idx="0">
               <a:schemeClr val="accent1"/>
             </a:effectRef>
             <a:fontRef idx="minor">
@@ -5806,15 +5860,16 @@
                 <a:srgbClr val="8FBFBF"/>
               </a:solidFill>
             </a:ln>
-          </p:spPr>
-          <p:style>
-            <a:lnRef idx="2">
-              <a:schemeClr val="accent1"/>
-            </a:lnRef>
-            <a:fillRef idx="0">
-              <a:schemeClr val="accent1"/>
-            </a:fillRef>
-            <a:effectRef idx="1">
+            <a:effectLst/>
+          </p:spPr>
+          <p:style>
+            <a:lnRef idx="2">
+              <a:schemeClr val="accent1"/>
+            </a:lnRef>
+            <a:fillRef idx="0">
+              <a:schemeClr val="accent1"/>
+            </a:fillRef>
+            <a:effectRef idx="0">
               <a:schemeClr val="accent1"/>
             </a:effectRef>
             <a:fontRef idx="minor">
@@ -5841,15 +5896,16 @@
                 <a:srgbClr val="8FBFBF"/>
               </a:solidFill>
             </a:ln>
-          </p:spPr>
-          <p:style>
-            <a:lnRef idx="2">
-              <a:schemeClr val="accent1"/>
-            </a:lnRef>
-            <a:fillRef idx="0">
-              <a:schemeClr val="accent1"/>
-            </a:fillRef>
-            <a:effectRef idx="1">
+            <a:effectLst/>
+          </p:spPr>
+          <p:style>
+            <a:lnRef idx="2">
+              <a:schemeClr val="accent1"/>
+            </a:lnRef>
+            <a:fillRef idx="0">
+              <a:schemeClr val="accent1"/>
+            </a:fillRef>
+            <a:effectRef idx="0">
               <a:schemeClr val="accent1"/>
             </a:effectRef>
             <a:fontRef idx="minor">
@@ -5901,7 +5957,7 @@
             <a:fillRef idx="3">
               <a:schemeClr val="accent1"/>
             </a:fillRef>
-            <a:effectRef idx="2">
+            <a:effectRef idx="0">
               <a:schemeClr val="accent1"/>
             </a:effectRef>
             <a:fontRef idx="minor">
@@ -5935,15 +5991,16 @@
                 <a:srgbClr val="8FBFBF"/>
               </a:solidFill>
             </a:ln>
-          </p:spPr>
-          <p:style>
-            <a:lnRef idx="2">
-              <a:schemeClr val="accent1"/>
-            </a:lnRef>
-            <a:fillRef idx="0">
-              <a:schemeClr val="accent1"/>
-            </a:fillRef>
-            <a:effectRef idx="1">
+            <a:effectLst/>
+          </p:spPr>
+          <p:style>
+            <a:lnRef idx="2">
+              <a:schemeClr val="accent1"/>
+            </a:lnRef>
+            <a:fillRef idx="0">
+              <a:schemeClr val="accent1"/>
+            </a:fillRef>
+            <a:effectRef idx="0">
               <a:schemeClr val="accent1"/>
             </a:effectRef>
             <a:fontRef idx="minor">
@@ -5970,15 +6027,16 @@
                 <a:srgbClr val="8FBFBF"/>
               </a:solidFill>
             </a:ln>
-          </p:spPr>
-          <p:style>
-            <a:lnRef idx="2">
-              <a:schemeClr val="accent1"/>
-            </a:lnRef>
-            <a:fillRef idx="0">
-              <a:schemeClr val="accent1"/>
-            </a:fillRef>
-            <a:effectRef idx="1">
+            <a:effectLst/>
+          </p:spPr>
+          <p:style>
+            <a:lnRef idx="2">
+              <a:schemeClr val="accent1"/>
+            </a:lnRef>
+            <a:fillRef idx="0">
+              <a:schemeClr val="accent1"/>
+            </a:fillRef>
+            <a:effectRef idx="0">
               <a:schemeClr val="accent1"/>
             </a:effectRef>
             <a:fontRef idx="minor">
@@ -6005,15 +6063,16 @@
                 <a:srgbClr val="8FBFBF"/>
               </a:solidFill>
             </a:ln>
-          </p:spPr>
-          <p:style>
-            <a:lnRef idx="2">
-              <a:schemeClr val="accent1"/>
-            </a:lnRef>
-            <a:fillRef idx="0">
-              <a:schemeClr val="accent1"/>
-            </a:fillRef>
-            <a:effectRef idx="1">
+            <a:effectLst/>
+          </p:spPr>
+          <p:style>
+            <a:lnRef idx="2">
+              <a:schemeClr val="accent1"/>
+            </a:lnRef>
+            <a:fillRef idx="0">
+              <a:schemeClr val="accent1"/>
+            </a:fillRef>
+            <a:effectRef idx="0">
               <a:schemeClr val="accent1"/>
             </a:effectRef>
             <a:fontRef idx="minor">
@@ -6040,15 +6099,16 @@
                 <a:srgbClr val="8FBFBF"/>
               </a:solidFill>
             </a:ln>
-          </p:spPr>
-          <p:style>
-            <a:lnRef idx="2">
-              <a:schemeClr val="accent1"/>
-            </a:lnRef>
-            <a:fillRef idx="0">
-              <a:schemeClr val="accent1"/>
-            </a:fillRef>
-            <a:effectRef idx="1">
+            <a:effectLst/>
+          </p:spPr>
+          <p:style>
+            <a:lnRef idx="2">
+              <a:schemeClr val="accent1"/>
+            </a:lnRef>
+            <a:fillRef idx="0">
+              <a:schemeClr val="accent1"/>
+            </a:fillRef>
+            <a:effectRef idx="0">
               <a:schemeClr val="accent1"/>
             </a:effectRef>
             <a:fontRef idx="minor">
@@ -6075,15 +6135,16 @@
                 <a:srgbClr val="8FBFBF"/>
               </a:solidFill>
             </a:ln>
-          </p:spPr>
-          <p:style>
-            <a:lnRef idx="2">
-              <a:schemeClr val="accent1"/>
-            </a:lnRef>
-            <a:fillRef idx="0">
-              <a:schemeClr val="accent1"/>
-            </a:fillRef>
-            <a:effectRef idx="1">
+            <a:effectLst/>
+          </p:spPr>
+          <p:style>
+            <a:lnRef idx="2">
+              <a:schemeClr val="accent1"/>
+            </a:lnRef>
+            <a:fillRef idx="0">
+              <a:schemeClr val="accent1"/>
+            </a:fillRef>
+            <a:effectRef idx="0">
               <a:schemeClr val="accent1"/>
             </a:effectRef>
             <a:fontRef idx="minor">
@@ -6110,15 +6171,16 @@
                 <a:srgbClr val="8FBFBF"/>
               </a:solidFill>
             </a:ln>
-          </p:spPr>
-          <p:style>
-            <a:lnRef idx="2">
-              <a:schemeClr val="accent1"/>
-            </a:lnRef>
-            <a:fillRef idx="0">
-              <a:schemeClr val="accent1"/>
-            </a:fillRef>
-            <a:effectRef idx="1">
+            <a:effectLst/>
+          </p:spPr>
+          <p:style>
+            <a:lnRef idx="2">
+              <a:schemeClr val="accent1"/>
+            </a:lnRef>
+            <a:fillRef idx="0">
+              <a:schemeClr val="accent1"/>
+            </a:fillRef>
+            <a:effectRef idx="0">
               <a:schemeClr val="accent1"/>
             </a:effectRef>
             <a:fontRef idx="minor">
@@ -6145,15 +6207,16 @@
                 <a:srgbClr val="8FBFBF"/>
               </a:solidFill>
             </a:ln>
-          </p:spPr>
-          <p:style>
-            <a:lnRef idx="2">
-              <a:schemeClr val="accent1"/>
-            </a:lnRef>
-            <a:fillRef idx="0">
-              <a:schemeClr val="accent1"/>
-            </a:fillRef>
-            <a:effectRef idx="1">
+            <a:effectLst/>
+          </p:spPr>
+          <p:style>
+            <a:lnRef idx="2">
+              <a:schemeClr val="accent1"/>
+            </a:lnRef>
+            <a:fillRef idx="0">
+              <a:schemeClr val="accent1"/>
+            </a:fillRef>
+            <a:effectRef idx="0">
               <a:schemeClr val="accent1"/>
             </a:effectRef>
             <a:fontRef idx="minor">
@@ -6180,15 +6243,16 @@
                 <a:srgbClr val="8FBFBF"/>
               </a:solidFill>
             </a:ln>
-          </p:spPr>
-          <p:style>
-            <a:lnRef idx="2">
-              <a:schemeClr val="accent1"/>
-            </a:lnRef>
-            <a:fillRef idx="0">
-              <a:schemeClr val="accent1"/>
-            </a:fillRef>
-            <a:effectRef idx="1">
+            <a:effectLst/>
+          </p:spPr>
+          <p:style>
+            <a:lnRef idx="2">
+              <a:schemeClr val="accent1"/>
+            </a:lnRef>
+            <a:fillRef idx="0">
+              <a:schemeClr val="accent1"/>
+            </a:fillRef>
+            <a:effectRef idx="0">
               <a:schemeClr val="accent1"/>
             </a:effectRef>
             <a:fontRef idx="minor">
@@ -6215,15 +6279,16 @@
                 <a:srgbClr val="8FBFBF"/>
               </a:solidFill>
             </a:ln>
-          </p:spPr>
-          <p:style>
-            <a:lnRef idx="2">
-              <a:schemeClr val="accent1"/>
-            </a:lnRef>
-            <a:fillRef idx="0">
-              <a:schemeClr val="accent1"/>
-            </a:fillRef>
-            <a:effectRef idx="1">
+            <a:effectLst/>
+          </p:spPr>
+          <p:style>
+            <a:lnRef idx="2">
+              <a:schemeClr val="accent1"/>
+            </a:lnRef>
+            <a:fillRef idx="0">
+              <a:schemeClr val="accent1"/>
+            </a:fillRef>
+            <a:effectRef idx="0">
               <a:schemeClr val="accent1"/>
             </a:effectRef>
             <a:fontRef idx="minor">
@@ -6250,15 +6315,16 @@
                 <a:srgbClr val="8FBFBF"/>
               </a:solidFill>
             </a:ln>
-          </p:spPr>
-          <p:style>
-            <a:lnRef idx="2">
-              <a:schemeClr val="accent1"/>
-            </a:lnRef>
-            <a:fillRef idx="0">
-              <a:schemeClr val="accent1"/>
-            </a:fillRef>
-            <a:effectRef idx="1">
+            <a:effectLst/>
+          </p:spPr>
+          <p:style>
+            <a:lnRef idx="2">
+              <a:schemeClr val="accent1"/>
+            </a:lnRef>
+            <a:fillRef idx="0">
+              <a:schemeClr val="accent1"/>
+            </a:fillRef>
+            <a:effectRef idx="0">
               <a:schemeClr val="accent1"/>
             </a:effectRef>
             <a:fontRef idx="minor">
@@ -6285,15 +6351,16 @@
                 <a:srgbClr val="8FBFBF"/>
               </a:solidFill>
             </a:ln>
-          </p:spPr>
-          <p:style>
-            <a:lnRef idx="2">
-              <a:schemeClr val="accent1"/>
-            </a:lnRef>
-            <a:fillRef idx="0">
-              <a:schemeClr val="accent1"/>
-            </a:fillRef>
-            <a:effectRef idx="1">
+            <a:effectLst/>
+          </p:spPr>
+          <p:style>
+            <a:lnRef idx="2">
+              <a:schemeClr val="accent1"/>
+            </a:lnRef>
+            <a:fillRef idx="0">
+              <a:schemeClr val="accent1"/>
+            </a:fillRef>
+            <a:effectRef idx="0">
               <a:schemeClr val="accent1"/>
             </a:effectRef>
             <a:fontRef idx="minor">
@@ -6345,7 +6412,7 @@
             <a:fillRef idx="3">
               <a:schemeClr val="accent1"/>
             </a:fillRef>
-            <a:effectRef idx="2">
+            <a:effectRef idx="0">
               <a:schemeClr val="accent1"/>
             </a:effectRef>
             <a:fontRef idx="minor">
@@ -6379,15 +6446,16 @@
                 <a:srgbClr val="8FBFBF"/>
               </a:solidFill>
             </a:ln>
-          </p:spPr>
-          <p:style>
-            <a:lnRef idx="2">
-              <a:schemeClr val="accent1"/>
-            </a:lnRef>
-            <a:fillRef idx="0">
-              <a:schemeClr val="accent1"/>
-            </a:fillRef>
-            <a:effectRef idx="1">
+            <a:effectLst/>
+          </p:spPr>
+          <p:style>
+            <a:lnRef idx="2">
+              <a:schemeClr val="accent1"/>
+            </a:lnRef>
+            <a:fillRef idx="0">
+              <a:schemeClr val="accent1"/>
+            </a:fillRef>
+            <a:effectRef idx="0">
               <a:schemeClr val="accent1"/>
             </a:effectRef>
             <a:fontRef idx="minor">
@@ -6414,15 +6482,16 @@
                 <a:srgbClr val="8FBFBF"/>
               </a:solidFill>
             </a:ln>
-          </p:spPr>
-          <p:style>
-            <a:lnRef idx="2">
-              <a:schemeClr val="accent1"/>
-            </a:lnRef>
-            <a:fillRef idx="0">
-              <a:schemeClr val="accent1"/>
-            </a:fillRef>
-            <a:effectRef idx="1">
+            <a:effectLst/>
+          </p:spPr>
+          <p:style>
+            <a:lnRef idx="2">
+              <a:schemeClr val="accent1"/>
+            </a:lnRef>
+            <a:fillRef idx="0">
+              <a:schemeClr val="accent1"/>
+            </a:fillRef>
+            <a:effectRef idx="0">
               <a:schemeClr val="accent1"/>
             </a:effectRef>
             <a:fontRef idx="minor">
@@ -6449,15 +6518,16 @@
                 <a:srgbClr val="8FBFBF"/>
               </a:solidFill>
             </a:ln>
-          </p:spPr>
-          <p:style>
-            <a:lnRef idx="2">
-              <a:schemeClr val="accent1"/>
-            </a:lnRef>
-            <a:fillRef idx="0">
-              <a:schemeClr val="accent1"/>
-            </a:fillRef>
-            <a:effectRef idx="1">
+            <a:effectLst/>
+          </p:spPr>
+          <p:style>
+            <a:lnRef idx="2">
+              <a:schemeClr val="accent1"/>
+            </a:lnRef>
+            <a:fillRef idx="0">
+              <a:schemeClr val="accent1"/>
+            </a:fillRef>
+            <a:effectRef idx="0">
               <a:schemeClr val="accent1"/>
             </a:effectRef>
             <a:fontRef idx="minor">
@@ -6484,15 +6554,16 @@
                 <a:srgbClr val="8FBFBF"/>
               </a:solidFill>
             </a:ln>
-          </p:spPr>
-          <p:style>
-            <a:lnRef idx="2">
-              <a:schemeClr val="accent1"/>
-            </a:lnRef>
-            <a:fillRef idx="0">
-              <a:schemeClr val="accent1"/>
-            </a:fillRef>
-            <a:effectRef idx="1">
+            <a:effectLst/>
+          </p:spPr>
+          <p:style>
+            <a:lnRef idx="2">
+              <a:schemeClr val="accent1"/>
+            </a:lnRef>
+            <a:fillRef idx="0">
+              <a:schemeClr val="accent1"/>
+            </a:fillRef>
+            <a:effectRef idx="0">
               <a:schemeClr val="accent1"/>
             </a:effectRef>
             <a:fontRef idx="minor">
@@ -6519,15 +6590,16 @@
                 <a:srgbClr val="8FBFBF"/>
               </a:solidFill>
             </a:ln>
-          </p:spPr>
-          <p:style>
-            <a:lnRef idx="2">
-              <a:schemeClr val="accent1"/>
-            </a:lnRef>
-            <a:fillRef idx="0">
-              <a:schemeClr val="accent1"/>
-            </a:fillRef>
-            <a:effectRef idx="1">
+            <a:effectLst/>
+          </p:spPr>
+          <p:style>
+            <a:lnRef idx="2">
+              <a:schemeClr val="accent1"/>
+            </a:lnRef>
+            <a:fillRef idx="0">
+              <a:schemeClr val="accent1"/>
+            </a:fillRef>
+            <a:effectRef idx="0">
               <a:schemeClr val="accent1"/>
             </a:effectRef>
             <a:fontRef idx="minor">
@@ -6554,15 +6626,16 @@
                 <a:srgbClr val="8FBFBF"/>
               </a:solidFill>
             </a:ln>
-          </p:spPr>
-          <p:style>
-            <a:lnRef idx="2">
-              <a:schemeClr val="accent1"/>
-            </a:lnRef>
-            <a:fillRef idx="0">
-              <a:schemeClr val="accent1"/>
-            </a:fillRef>
-            <a:effectRef idx="1">
+            <a:effectLst/>
+          </p:spPr>
+          <p:style>
+            <a:lnRef idx="2">
+              <a:schemeClr val="accent1"/>
+            </a:lnRef>
+            <a:fillRef idx="0">
+              <a:schemeClr val="accent1"/>
+            </a:fillRef>
+            <a:effectRef idx="0">
               <a:schemeClr val="accent1"/>
             </a:effectRef>
             <a:fontRef idx="minor">
@@ -6589,15 +6662,16 @@
                 <a:srgbClr val="8FBFBF"/>
               </a:solidFill>
             </a:ln>
-          </p:spPr>
-          <p:style>
-            <a:lnRef idx="2">
-              <a:schemeClr val="accent1"/>
-            </a:lnRef>
-            <a:fillRef idx="0">
-              <a:schemeClr val="accent1"/>
-            </a:fillRef>
-            <a:effectRef idx="1">
+            <a:effectLst/>
+          </p:spPr>
+          <p:style>
+            <a:lnRef idx="2">
+              <a:schemeClr val="accent1"/>
+            </a:lnRef>
+            <a:fillRef idx="0">
+              <a:schemeClr val="accent1"/>
+            </a:fillRef>
+            <a:effectRef idx="0">
               <a:schemeClr val="accent1"/>
             </a:effectRef>
             <a:fontRef idx="minor">
@@ -6624,15 +6698,16 @@
                 <a:srgbClr val="8FBFBF"/>
               </a:solidFill>
             </a:ln>
-          </p:spPr>
-          <p:style>
-            <a:lnRef idx="2">
-              <a:schemeClr val="accent1"/>
-            </a:lnRef>
-            <a:fillRef idx="0">
-              <a:schemeClr val="accent1"/>
-            </a:fillRef>
-            <a:effectRef idx="1">
+            <a:effectLst/>
+          </p:spPr>
+          <p:style>
+            <a:lnRef idx="2">
+              <a:schemeClr val="accent1"/>
+            </a:lnRef>
+            <a:fillRef idx="0">
+              <a:schemeClr val="accent1"/>
+            </a:fillRef>
+            <a:effectRef idx="0">
               <a:schemeClr val="accent1"/>
             </a:effectRef>
             <a:fontRef idx="minor">
@@ -6659,15 +6734,16 @@
                 <a:srgbClr val="8FBFBF"/>
               </a:solidFill>
             </a:ln>
-          </p:spPr>
-          <p:style>
-            <a:lnRef idx="2">
-              <a:schemeClr val="accent1"/>
-            </a:lnRef>
-            <a:fillRef idx="0">
-              <a:schemeClr val="accent1"/>
-            </a:fillRef>
-            <a:effectRef idx="1">
+            <a:effectLst/>
+          </p:spPr>
+          <p:style>
+            <a:lnRef idx="2">
+              <a:schemeClr val="accent1"/>
+            </a:lnRef>
+            <a:fillRef idx="0">
+              <a:schemeClr val="accent1"/>
+            </a:fillRef>
+            <a:effectRef idx="0">
               <a:schemeClr val="accent1"/>
             </a:effectRef>
             <a:fontRef idx="minor">
@@ -6694,15 +6770,16 @@
                 <a:srgbClr val="8FBFBF"/>
               </a:solidFill>
             </a:ln>
-          </p:spPr>
-          <p:style>
-            <a:lnRef idx="2">
-              <a:schemeClr val="accent1"/>
-            </a:lnRef>
-            <a:fillRef idx="0">
-              <a:schemeClr val="accent1"/>
-            </a:fillRef>
-            <a:effectRef idx="1">
+            <a:effectLst/>
+          </p:spPr>
+          <p:style>
+            <a:lnRef idx="2">
+              <a:schemeClr val="accent1"/>
+            </a:lnRef>
+            <a:fillRef idx="0">
+              <a:schemeClr val="accent1"/>
+            </a:fillRef>
+            <a:effectRef idx="0">
               <a:schemeClr val="accent1"/>
             </a:effectRef>
             <a:fontRef idx="minor">
@@ -6729,15 +6806,16 @@
                 <a:srgbClr val="8FBFBF"/>
               </a:solidFill>
             </a:ln>
-          </p:spPr>
-          <p:style>
-            <a:lnRef idx="2">
-              <a:schemeClr val="accent1"/>
-            </a:lnRef>
-            <a:fillRef idx="0">
-              <a:schemeClr val="accent1"/>
-            </a:fillRef>
-            <a:effectRef idx="1">
+            <a:effectLst/>
+          </p:spPr>
+          <p:style>
+            <a:lnRef idx="2">
+              <a:schemeClr val="accent1"/>
+            </a:lnRef>
+            <a:fillRef idx="0">
+              <a:schemeClr val="accent1"/>
+            </a:fillRef>
+            <a:effectRef idx="0">
               <a:schemeClr val="accent1"/>
             </a:effectRef>
             <a:fontRef idx="minor">
@@ -6789,7 +6867,7 @@
             <a:fillRef idx="3">
               <a:schemeClr val="accent1"/>
             </a:fillRef>
-            <a:effectRef idx="2">
+            <a:effectRef idx="0">
               <a:schemeClr val="accent1"/>
             </a:effectRef>
             <a:fontRef idx="minor">
@@ -6823,15 +6901,16 @@
                 <a:srgbClr val="8FBFBF"/>
               </a:solidFill>
             </a:ln>
-          </p:spPr>
-          <p:style>
-            <a:lnRef idx="2">
-              <a:schemeClr val="accent1"/>
-            </a:lnRef>
-            <a:fillRef idx="0">
-              <a:schemeClr val="accent1"/>
-            </a:fillRef>
-            <a:effectRef idx="1">
+            <a:effectLst/>
+          </p:spPr>
+          <p:style>
+            <a:lnRef idx="2">
+              <a:schemeClr val="accent1"/>
+            </a:lnRef>
+            <a:fillRef idx="0">
+              <a:schemeClr val="accent1"/>
+            </a:fillRef>
+            <a:effectRef idx="0">
               <a:schemeClr val="accent1"/>
             </a:effectRef>
             <a:fontRef idx="minor">
@@ -6858,15 +6937,16 @@
                 <a:srgbClr val="8FBFBF"/>
               </a:solidFill>
             </a:ln>
-          </p:spPr>
-          <p:style>
-            <a:lnRef idx="2">
-              <a:schemeClr val="accent1"/>
-            </a:lnRef>
-            <a:fillRef idx="0">
-              <a:schemeClr val="accent1"/>
-            </a:fillRef>
-            <a:effectRef idx="1">
+            <a:effectLst/>
+          </p:spPr>
+          <p:style>
+            <a:lnRef idx="2">
+              <a:schemeClr val="accent1"/>
+            </a:lnRef>
+            <a:fillRef idx="0">
+              <a:schemeClr val="accent1"/>
+            </a:fillRef>
+            <a:effectRef idx="0">
               <a:schemeClr val="accent1"/>
             </a:effectRef>
             <a:fontRef idx="minor">
@@ -6893,15 +6973,16 @@
                 <a:srgbClr val="8FBFBF"/>
               </a:solidFill>
             </a:ln>
-          </p:spPr>
-          <p:style>
-            <a:lnRef idx="2">
-              <a:schemeClr val="accent1"/>
-            </a:lnRef>
-            <a:fillRef idx="0">
-              <a:schemeClr val="accent1"/>
-            </a:fillRef>
-            <a:effectRef idx="1">
+            <a:effectLst/>
+          </p:spPr>
+          <p:style>
+            <a:lnRef idx="2">
+              <a:schemeClr val="accent1"/>
+            </a:lnRef>
+            <a:fillRef idx="0">
+              <a:schemeClr val="accent1"/>
+            </a:fillRef>
+            <a:effectRef idx="0">
               <a:schemeClr val="accent1"/>
             </a:effectRef>
             <a:fontRef idx="minor">
@@ -6928,15 +7009,16 @@
                 <a:srgbClr val="8FBFBF"/>
               </a:solidFill>
             </a:ln>
-          </p:spPr>
-          <p:style>
-            <a:lnRef idx="2">
-              <a:schemeClr val="accent1"/>
-            </a:lnRef>
-            <a:fillRef idx="0">
-              <a:schemeClr val="accent1"/>
-            </a:fillRef>
-            <a:effectRef idx="1">
+            <a:effectLst/>
+          </p:spPr>
+          <p:style>
+            <a:lnRef idx="2">
+              <a:schemeClr val="accent1"/>
+            </a:lnRef>
+            <a:fillRef idx="0">
+              <a:schemeClr val="accent1"/>
+            </a:fillRef>
+            <a:effectRef idx="0">
               <a:schemeClr val="accent1"/>
             </a:effectRef>
             <a:fontRef idx="minor">
@@ -6963,15 +7045,16 @@
                 <a:srgbClr val="8FBFBF"/>
               </a:solidFill>
             </a:ln>
-          </p:spPr>
-          <p:style>
-            <a:lnRef idx="2">
-              <a:schemeClr val="accent1"/>
-            </a:lnRef>
-            <a:fillRef idx="0">
-              <a:schemeClr val="accent1"/>
-            </a:fillRef>
-            <a:effectRef idx="1">
+            <a:effectLst/>
+          </p:spPr>
+          <p:style>
+            <a:lnRef idx="2">
+              <a:schemeClr val="accent1"/>
+            </a:lnRef>
+            <a:fillRef idx="0">
+              <a:schemeClr val="accent1"/>
+            </a:fillRef>
+            <a:effectRef idx="0">
               <a:schemeClr val="accent1"/>
             </a:effectRef>
             <a:fontRef idx="minor">
@@ -6998,15 +7081,16 @@
                 <a:srgbClr val="8FBFBF"/>
               </a:solidFill>
             </a:ln>
-          </p:spPr>
-          <p:style>
-            <a:lnRef idx="2">
-              <a:schemeClr val="accent1"/>
-            </a:lnRef>
-            <a:fillRef idx="0">
-              <a:schemeClr val="accent1"/>
-            </a:fillRef>
-            <a:effectRef idx="1">
+            <a:effectLst/>
+          </p:spPr>
+          <p:style>
+            <a:lnRef idx="2">
+              <a:schemeClr val="accent1"/>
+            </a:lnRef>
+            <a:fillRef idx="0">
+              <a:schemeClr val="accent1"/>
+            </a:fillRef>
+            <a:effectRef idx="0">
               <a:schemeClr val="accent1"/>
             </a:effectRef>
             <a:fontRef idx="minor">
@@ -7033,15 +7117,16 @@
                 <a:srgbClr val="8FBFBF"/>
               </a:solidFill>
             </a:ln>
-          </p:spPr>
-          <p:style>
-            <a:lnRef idx="2">
-              <a:schemeClr val="accent1"/>
-            </a:lnRef>
-            <a:fillRef idx="0">
-              <a:schemeClr val="accent1"/>
-            </a:fillRef>
-            <a:effectRef idx="1">
+            <a:effectLst/>
+          </p:spPr>
+          <p:style>
+            <a:lnRef idx="2">
+              <a:schemeClr val="accent1"/>
+            </a:lnRef>
+            <a:fillRef idx="0">
+              <a:schemeClr val="accent1"/>
+            </a:fillRef>
+            <a:effectRef idx="0">
               <a:schemeClr val="accent1"/>
             </a:effectRef>
             <a:fontRef idx="minor">
@@ -7068,15 +7153,16 @@
                 <a:srgbClr val="8FBFBF"/>
               </a:solidFill>
             </a:ln>
-          </p:spPr>
-          <p:style>
-            <a:lnRef idx="2">
-              <a:schemeClr val="accent1"/>
-            </a:lnRef>
-            <a:fillRef idx="0">
-              <a:schemeClr val="accent1"/>
-            </a:fillRef>
-            <a:effectRef idx="1">
+            <a:effectLst/>
+          </p:spPr>
+          <p:style>
+            <a:lnRef idx="2">
+              <a:schemeClr val="accent1"/>
+            </a:lnRef>
+            <a:fillRef idx="0">
+              <a:schemeClr val="accent1"/>
+            </a:fillRef>
+            <a:effectRef idx="0">
               <a:schemeClr val="accent1"/>
             </a:effectRef>
             <a:fontRef idx="minor">
@@ -7103,15 +7189,16 @@
                 <a:srgbClr val="8FBFBF"/>
               </a:solidFill>
             </a:ln>
-          </p:spPr>
-          <p:style>
-            <a:lnRef idx="2">
-              <a:schemeClr val="accent1"/>
-            </a:lnRef>
-            <a:fillRef idx="0">
-              <a:schemeClr val="accent1"/>
-            </a:fillRef>
-            <a:effectRef idx="1">
+            <a:effectLst/>
+          </p:spPr>
+          <p:style>
+            <a:lnRef idx="2">
+              <a:schemeClr val="accent1"/>
+            </a:lnRef>
+            <a:fillRef idx="0">
+              <a:schemeClr val="accent1"/>
+            </a:fillRef>
+            <a:effectRef idx="0">
               <a:schemeClr val="accent1"/>
             </a:effectRef>
             <a:fontRef idx="minor">
@@ -7138,15 +7225,16 @@
                 <a:srgbClr val="8FBFBF"/>
               </a:solidFill>
             </a:ln>
-          </p:spPr>
-          <p:style>
-            <a:lnRef idx="2">
-              <a:schemeClr val="accent1"/>
-            </a:lnRef>
-            <a:fillRef idx="0">
-              <a:schemeClr val="accent1"/>
-            </a:fillRef>
-            <a:effectRef idx="1">
+            <a:effectLst/>
+          </p:spPr>
+          <p:style>
+            <a:lnRef idx="2">
+              <a:schemeClr val="accent1"/>
+            </a:lnRef>
+            <a:fillRef idx="0">
+              <a:schemeClr val="accent1"/>
+            </a:fillRef>
+            <a:effectRef idx="0">
               <a:schemeClr val="accent1"/>
             </a:effectRef>
             <a:fontRef idx="minor">
@@ -7173,15 +7261,16 @@
                 <a:srgbClr val="8FBFBF"/>
               </a:solidFill>
             </a:ln>
-          </p:spPr>
-          <p:style>
-            <a:lnRef idx="2">
-              <a:schemeClr val="accent1"/>
-            </a:lnRef>
-            <a:fillRef idx="0">
-              <a:schemeClr val="accent1"/>
-            </a:fillRef>
-            <a:effectRef idx="1">
+            <a:effectLst/>
+          </p:spPr>
+          <p:style>
+            <a:lnRef idx="2">
+              <a:schemeClr val="accent1"/>
+            </a:lnRef>
+            <a:fillRef idx="0">
+              <a:schemeClr val="accent1"/>
+            </a:fillRef>
+            <a:effectRef idx="0">
               <a:schemeClr val="accent1"/>
             </a:effectRef>
             <a:fontRef idx="minor">

--- a/gakkyu/tegami/pptx/T1.pptx
+++ b/gakkyu/tegami/pptx/T1.pptx
@@ -3568,44 +3568,9 @@
           </a:p>
         </p:txBody>
       </p:sp>
-      <p:sp>
-        <p:nvSpPr>
-          <p:cNvPr id="3" name="名前欄"/>
-          <p:cNvSpPr txBox="1"/>
-          <p:nvPr/>
-        </p:nvSpPr>
-        <p:spPr>
-          <a:xfrm>
-            <a:off x="3600000" y="475200"/>
-            <a:ext cx="3420000" cy="252000"/>
-          </a:xfrm>
-          <a:prstGeom prst="rect">
-            <a:avLst/>
-          </a:prstGeom>
-          <a:noFill/>
-        </p:spPr>
-        <p:txBody>
-          <a:bodyPr wrap="square" lIns="0" rIns="0" tIns="0" bIns="0" anchor="t">
-            <a:spAutoFit/>
-          </a:bodyPr>
-          <a:lstStyle/>
-          <a:p>
-            <a:pPr algn="r"/>
-            <a:r>
-              <a:rPr sz="1000" b="0">
-                <a:solidFill>
-                  <a:srgbClr val="38424B"/>
-                </a:solidFill>
-                <a:latin typeface="UD デジタル 教科書体 N-R"/>
-              </a:rPr>
-              <a:t>（　　年　　組　　名前　　　　　　　　）</a:t>
-            </a:r>
-          </a:p>
-        </p:txBody>
-      </p:sp>
       <p:cxnSp>
         <p:nvCxnSpPr>
-          <p:cNvPr id="4" name="見出しの線"/>
+          <p:cNvPr id="3" name="見出しの線"/>
           <p:cNvCxnSpPr/>
           <p:nvPr/>
         </p:nvCxnSpPr>
@@ -3641,7 +3606,7 @@
       </p:cxnSp>
       <p:grpSp>
         <p:nvGrpSpPr>
-          <p:cNvPr id="5" name="1行目（右から）"/>
+          <p:cNvPr id="4" name="1行目（右から）"/>
           <p:cNvGrpSpPr/>
           <p:nvPr/>
         </p:nvGrpSpPr>
@@ -3655,7 +3620,7 @@
         </p:grpSpPr>
         <p:sp>
           <p:nvSpPr>
-            <p:cNvPr id="6" name="外わく"/>
+            <p:cNvPr id="5" name="外わく"/>
             <p:cNvSpPr/>
             <p:nvPr/>
           </p:nvSpPr>
@@ -3699,7 +3664,7 @@
         </p:sp>
         <p:cxnSp>
           <p:nvCxnSpPr>
-            <p:cNvPr id="7" name="マスの線 1"/>
+            <p:cNvPr id="6" name="マスの線 1"/>
             <p:cNvCxnSpPr/>
             <p:nvPr/>
           </p:nvCxnSpPr>
@@ -3735,7 +3700,7 @@
         </p:cxnSp>
         <p:cxnSp>
           <p:nvCxnSpPr>
-            <p:cNvPr id="8" name="マスの線 2"/>
+            <p:cNvPr id="7" name="マスの線 2"/>
             <p:cNvCxnSpPr/>
             <p:nvPr/>
           </p:nvCxnSpPr>
@@ -3771,7 +3736,7 @@
         </p:cxnSp>
         <p:cxnSp>
           <p:nvCxnSpPr>
-            <p:cNvPr id="9" name="マスの線 3"/>
+            <p:cNvPr id="8" name="マスの線 3"/>
             <p:cNvCxnSpPr/>
             <p:nvPr/>
           </p:nvCxnSpPr>
@@ -3807,7 +3772,7 @@
         </p:cxnSp>
         <p:cxnSp>
           <p:nvCxnSpPr>
-            <p:cNvPr id="10" name="マスの線 4"/>
+            <p:cNvPr id="9" name="マスの線 4"/>
             <p:cNvCxnSpPr/>
             <p:nvPr/>
           </p:nvCxnSpPr>
@@ -3843,7 +3808,7 @@
         </p:cxnSp>
         <p:cxnSp>
           <p:nvCxnSpPr>
-            <p:cNvPr id="11" name="マスの線 5"/>
+            <p:cNvPr id="10" name="マスの線 5"/>
             <p:cNvCxnSpPr/>
             <p:nvPr/>
           </p:nvCxnSpPr>
@@ -3879,7 +3844,7 @@
         </p:cxnSp>
         <p:cxnSp>
           <p:nvCxnSpPr>
-            <p:cNvPr id="12" name="マスの線 6"/>
+            <p:cNvPr id="11" name="マスの線 6"/>
             <p:cNvCxnSpPr/>
             <p:nvPr/>
           </p:nvCxnSpPr>
@@ -3915,7 +3880,7 @@
         </p:cxnSp>
         <p:cxnSp>
           <p:nvCxnSpPr>
-            <p:cNvPr id="13" name="マスの線 7"/>
+            <p:cNvPr id="12" name="マスの線 7"/>
             <p:cNvCxnSpPr/>
             <p:nvPr/>
           </p:nvCxnSpPr>
@@ -3951,7 +3916,7 @@
         </p:cxnSp>
         <p:cxnSp>
           <p:nvCxnSpPr>
-            <p:cNvPr id="14" name="マスの線 8"/>
+            <p:cNvPr id="13" name="マスの線 8"/>
             <p:cNvCxnSpPr/>
             <p:nvPr/>
           </p:nvCxnSpPr>
@@ -3987,7 +3952,7 @@
         </p:cxnSp>
         <p:cxnSp>
           <p:nvCxnSpPr>
-            <p:cNvPr id="15" name="マスの線 9"/>
+            <p:cNvPr id="14" name="マスの線 9"/>
             <p:cNvCxnSpPr/>
             <p:nvPr/>
           </p:nvCxnSpPr>
@@ -4023,7 +3988,7 @@
         </p:cxnSp>
         <p:cxnSp>
           <p:nvCxnSpPr>
-            <p:cNvPr id="16" name="マスの線 10"/>
+            <p:cNvPr id="15" name="マスの線 10"/>
             <p:cNvCxnSpPr/>
             <p:nvPr/>
           </p:nvCxnSpPr>
@@ -4059,7 +4024,7 @@
         </p:cxnSp>
         <p:cxnSp>
           <p:nvCxnSpPr>
-            <p:cNvPr id="17" name="マスの線 11"/>
+            <p:cNvPr id="16" name="マスの線 11"/>
             <p:cNvCxnSpPr/>
             <p:nvPr/>
           </p:nvCxnSpPr>
@@ -4096,7 +4061,7 @@
       </p:grpSp>
       <p:grpSp>
         <p:nvGrpSpPr>
-          <p:cNvPr id="18" name="2行目（右から）"/>
+          <p:cNvPr id="17" name="2行目（右から）"/>
           <p:cNvGrpSpPr/>
           <p:nvPr/>
         </p:nvGrpSpPr>
@@ -4110,7 +4075,7 @@
         </p:grpSpPr>
         <p:sp>
           <p:nvSpPr>
-            <p:cNvPr id="19" name="外わく"/>
+            <p:cNvPr id="18" name="外わく"/>
             <p:cNvSpPr/>
             <p:nvPr/>
           </p:nvSpPr>
@@ -4154,7 +4119,7 @@
         </p:sp>
         <p:cxnSp>
           <p:nvCxnSpPr>
-            <p:cNvPr id="20" name="マスの線 1"/>
+            <p:cNvPr id="19" name="マスの線 1"/>
             <p:cNvCxnSpPr/>
             <p:nvPr/>
           </p:nvCxnSpPr>
@@ -4190,7 +4155,7 @@
         </p:cxnSp>
         <p:cxnSp>
           <p:nvCxnSpPr>
-            <p:cNvPr id="21" name="マスの線 2"/>
+            <p:cNvPr id="20" name="マスの線 2"/>
             <p:cNvCxnSpPr/>
             <p:nvPr/>
           </p:nvCxnSpPr>
@@ -4226,7 +4191,7 @@
         </p:cxnSp>
         <p:cxnSp>
           <p:nvCxnSpPr>
-            <p:cNvPr id="22" name="マスの線 3"/>
+            <p:cNvPr id="21" name="マスの線 3"/>
             <p:cNvCxnSpPr/>
             <p:nvPr/>
           </p:nvCxnSpPr>
@@ -4262,7 +4227,7 @@
         </p:cxnSp>
         <p:cxnSp>
           <p:nvCxnSpPr>
-            <p:cNvPr id="23" name="マスの線 4"/>
+            <p:cNvPr id="22" name="マスの線 4"/>
             <p:cNvCxnSpPr/>
             <p:nvPr/>
           </p:nvCxnSpPr>
@@ -4298,7 +4263,7 @@
         </p:cxnSp>
         <p:cxnSp>
           <p:nvCxnSpPr>
-            <p:cNvPr id="24" name="マスの線 5"/>
+            <p:cNvPr id="23" name="マスの線 5"/>
             <p:cNvCxnSpPr/>
             <p:nvPr/>
           </p:nvCxnSpPr>
@@ -4334,7 +4299,7 @@
         </p:cxnSp>
         <p:cxnSp>
           <p:nvCxnSpPr>
-            <p:cNvPr id="25" name="マスの線 6"/>
+            <p:cNvPr id="24" name="マスの線 6"/>
             <p:cNvCxnSpPr/>
             <p:nvPr/>
           </p:nvCxnSpPr>
@@ -4370,7 +4335,7 @@
         </p:cxnSp>
         <p:cxnSp>
           <p:nvCxnSpPr>
-            <p:cNvPr id="26" name="マスの線 7"/>
+            <p:cNvPr id="25" name="マスの線 7"/>
             <p:cNvCxnSpPr/>
             <p:nvPr/>
           </p:nvCxnSpPr>
@@ -4406,7 +4371,7 @@
         </p:cxnSp>
         <p:cxnSp>
           <p:nvCxnSpPr>
-            <p:cNvPr id="27" name="マスの線 8"/>
+            <p:cNvPr id="26" name="マスの線 8"/>
             <p:cNvCxnSpPr/>
             <p:nvPr/>
           </p:nvCxnSpPr>
@@ -4442,7 +4407,7 @@
         </p:cxnSp>
         <p:cxnSp>
           <p:nvCxnSpPr>
-            <p:cNvPr id="28" name="マスの線 9"/>
+            <p:cNvPr id="27" name="マスの線 9"/>
             <p:cNvCxnSpPr/>
             <p:nvPr/>
           </p:nvCxnSpPr>
@@ -4478,7 +4443,7 @@
         </p:cxnSp>
         <p:cxnSp>
           <p:nvCxnSpPr>
-            <p:cNvPr id="29" name="マスの線 10"/>
+            <p:cNvPr id="28" name="マスの線 10"/>
             <p:cNvCxnSpPr/>
             <p:nvPr/>
           </p:nvCxnSpPr>
@@ -4514,7 +4479,7 @@
         </p:cxnSp>
         <p:cxnSp>
           <p:nvCxnSpPr>
-            <p:cNvPr id="30" name="マスの線 11"/>
+            <p:cNvPr id="29" name="マスの線 11"/>
             <p:cNvCxnSpPr/>
             <p:nvPr/>
           </p:nvCxnSpPr>
@@ -4551,7 +4516,7 @@
       </p:grpSp>
       <p:grpSp>
         <p:nvGrpSpPr>
-          <p:cNvPr id="31" name="3行目（右から）"/>
+          <p:cNvPr id="30" name="3行目（右から）"/>
           <p:cNvGrpSpPr/>
           <p:nvPr/>
         </p:nvGrpSpPr>
@@ -4565,7 +4530,7 @@
         </p:grpSpPr>
         <p:sp>
           <p:nvSpPr>
-            <p:cNvPr id="32" name="外わく"/>
+            <p:cNvPr id="31" name="外わく"/>
             <p:cNvSpPr/>
             <p:nvPr/>
           </p:nvSpPr>
@@ -4609,7 +4574,7 @@
         </p:sp>
         <p:cxnSp>
           <p:nvCxnSpPr>
-            <p:cNvPr id="33" name="マスの線 1"/>
+            <p:cNvPr id="32" name="マスの線 1"/>
             <p:cNvCxnSpPr/>
             <p:nvPr/>
           </p:nvCxnSpPr>
@@ -4645,7 +4610,7 @@
         </p:cxnSp>
         <p:cxnSp>
           <p:nvCxnSpPr>
-            <p:cNvPr id="34" name="マスの線 2"/>
+            <p:cNvPr id="33" name="マスの線 2"/>
             <p:cNvCxnSpPr/>
             <p:nvPr/>
           </p:nvCxnSpPr>
@@ -4681,7 +4646,7 @@
         </p:cxnSp>
         <p:cxnSp>
           <p:nvCxnSpPr>
-            <p:cNvPr id="35" name="マスの線 3"/>
+            <p:cNvPr id="34" name="マスの線 3"/>
             <p:cNvCxnSpPr/>
             <p:nvPr/>
           </p:nvCxnSpPr>
@@ -4717,7 +4682,7 @@
         </p:cxnSp>
         <p:cxnSp>
           <p:nvCxnSpPr>
-            <p:cNvPr id="36" name="マスの線 4"/>
+            <p:cNvPr id="35" name="マスの線 4"/>
             <p:cNvCxnSpPr/>
             <p:nvPr/>
           </p:nvCxnSpPr>
@@ -4753,7 +4718,7 @@
         </p:cxnSp>
         <p:cxnSp>
           <p:nvCxnSpPr>
-            <p:cNvPr id="37" name="マスの線 5"/>
+            <p:cNvPr id="36" name="マスの線 5"/>
             <p:cNvCxnSpPr/>
             <p:nvPr/>
           </p:nvCxnSpPr>
@@ -4789,7 +4754,7 @@
         </p:cxnSp>
         <p:cxnSp>
           <p:nvCxnSpPr>
-            <p:cNvPr id="38" name="マスの線 6"/>
+            <p:cNvPr id="37" name="マスの線 6"/>
             <p:cNvCxnSpPr/>
             <p:nvPr/>
           </p:nvCxnSpPr>
@@ -4825,7 +4790,7 @@
         </p:cxnSp>
         <p:cxnSp>
           <p:nvCxnSpPr>
-            <p:cNvPr id="39" name="マスの線 7"/>
+            <p:cNvPr id="38" name="マスの線 7"/>
             <p:cNvCxnSpPr/>
             <p:nvPr/>
           </p:nvCxnSpPr>
@@ -4861,7 +4826,7 @@
         </p:cxnSp>
         <p:cxnSp>
           <p:nvCxnSpPr>
-            <p:cNvPr id="40" name="マスの線 8"/>
+            <p:cNvPr id="39" name="マスの線 8"/>
             <p:cNvCxnSpPr/>
             <p:nvPr/>
           </p:nvCxnSpPr>
@@ -4897,7 +4862,7 @@
         </p:cxnSp>
         <p:cxnSp>
           <p:nvCxnSpPr>
-            <p:cNvPr id="41" name="マスの線 9"/>
+            <p:cNvPr id="40" name="マスの線 9"/>
             <p:cNvCxnSpPr/>
             <p:nvPr/>
           </p:nvCxnSpPr>
@@ -4933,7 +4898,7 @@
         </p:cxnSp>
         <p:cxnSp>
           <p:nvCxnSpPr>
-            <p:cNvPr id="42" name="マスの線 10"/>
+            <p:cNvPr id="41" name="マスの線 10"/>
             <p:cNvCxnSpPr/>
             <p:nvPr/>
           </p:nvCxnSpPr>
@@ -4969,7 +4934,7 @@
         </p:cxnSp>
         <p:cxnSp>
           <p:nvCxnSpPr>
-            <p:cNvPr id="43" name="マスの線 11"/>
+            <p:cNvPr id="42" name="マスの線 11"/>
             <p:cNvCxnSpPr/>
             <p:nvPr/>
           </p:nvCxnSpPr>
@@ -5006,7 +4971,7 @@
       </p:grpSp>
       <p:grpSp>
         <p:nvGrpSpPr>
-          <p:cNvPr id="44" name="4行目（右から）"/>
+          <p:cNvPr id="43" name="4行目（右から）"/>
           <p:cNvGrpSpPr/>
           <p:nvPr/>
         </p:nvGrpSpPr>
@@ -5020,7 +4985,7 @@
         </p:grpSpPr>
         <p:sp>
           <p:nvSpPr>
-            <p:cNvPr id="45" name="外わく"/>
+            <p:cNvPr id="44" name="外わく"/>
             <p:cNvSpPr/>
             <p:nvPr/>
           </p:nvSpPr>
@@ -5064,7 +5029,7 @@
         </p:sp>
         <p:cxnSp>
           <p:nvCxnSpPr>
-            <p:cNvPr id="46" name="マスの線 1"/>
+            <p:cNvPr id="45" name="マスの線 1"/>
             <p:cNvCxnSpPr/>
             <p:nvPr/>
           </p:nvCxnSpPr>
@@ -5100,7 +5065,7 @@
         </p:cxnSp>
         <p:cxnSp>
           <p:nvCxnSpPr>
-            <p:cNvPr id="47" name="マスの線 2"/>
+            <p:cNvPr id="46" name="マスの線 2"/>
             <p:cNvCxnSpPr/>
             <p:nvPr/>
           </p:nvCxnSpPr>
@@ -5136,7 +5101,7 @@
         </p:cxnSp>
         <p:cxnSp>
           <p:nvCxnSpPr>
-            <p:cNvPr id="48" name="マスの線 3"/>
+            <p:cNvPr id="47" name="マスの線 3"/>
             <p:cNvCxnSpPr/>
             <p:nvPr/>
           </p:nvCxnSpPr>
@@ -5172,7 +5137,7 @@
         </p:cxnSp>
         <p:cxnSp>
           <p:nvCxnSpPr>
-            <p:cNvPr id="49" name="マスの線 4"/>
+            <p:cNvPr id="48" name="マスの線 4"/>
             <p:cNvCxnSpPr/>
             <p:nvPr/>
           </p:nvCxnSpPr>
@@ -5208,7 +5173,7 @@
         </p:cxnSp>
         <p:cxnSp>
           <p:nvCxnSpPr>
-            <p:cNvPr id="50" name="マスの線 5"/>
+            <p:cNvPr id="49" name="マスの線 5"/>
             <p:cNvCxnSpPr/>
             <p:nvPr/>
           </p:nvCxnSpPr>
@@ -5244,7 +5209,7 @@
         </p:cxnSp>
         <p:cxnSp>
           <p:nvCxnSpPr>
-            <p:cNvPr id="51" name="マスの線 6"/>
+            <p:cNvPr id="50" name="マスの線 6"/>
             <p:cNvCxnSpPr/>
             <p:nvPr/>
           </p:nvCxnSpPr>
@@ -5280,7 +5245,7 @@
         </p:cxnSp>
         <p:cxnSp>
           <p:nvCxnSpPr>
-            <p:cNvPr id="52" name="マスの線 7"/>
+            <p:cNvPr id="51" name="マスの線 7"/>
             <p:cNvCxnSpPr/>
             <p:nvPr/>
           </p:nvCxnSpPr>
@@ -5316,7 +5281,7 @@
         </p:cxnSp>
         <p:cxnSp>
           <p:nvCxnSpPr>
-            <p:cNvPr id="53" name="マスの線 8"/>
+            <p:cNvPr id="52" name="マスの線 8"/>
             <p:cNvCxnSpPr/>
             <p:nvPr/>
           </p:nvCxnSpPr>
@@ -5352,7 +5317,7 @@
         </p:cxnSp>
         <p:cxnSp>
           <p:nvCxnSpPr>
-            <p:cNvPr id="54" name="マスの線 9"/>
+            <p:cNvPr id="53" name="マスの線 9"/>
             <p:cNvCxnSpPr/>
             <p:nvPr/>
           </p:nvCxnSpPr>
@@ -5388,7 +5353,7 @@
         </p:cxnSp>
         <p:cxnSp>
           <p:nvCxnSpPr>
-            <p:cNvPr id="55" name="マスの線 10"/>
+            <p:cNvPr id="54" name="マスの線 10"/>
             <p:cNvCxnSpPr/>
             <p:nvPr/>
           </p:nvCxnSpPr>
@@ -5424,7 +5389,7 @@
         </p:cxnSp>
         <p:cxnSp>
           <p:nvCxnSpPr>
-            <p:cNvPr id="56" name="マスの線 11"/>
+            <p:cNvPr id="55" name="マスの線 11"/>
             <p:cNvCxnSpPr/>
             <p:nvPr/>
           </p:nvCxnSpPr>
@@ -5461,7 +5426,7 @@
       </p:grpSp>
       <p:grpSp>
         <p:nvGrpSpPr>
-          <p:cNvPr id="57" name="5行目（右から）"/>
+          <p:cNvPr id="56" name="5行目（右から）"/>
           <p:cNvGrpSpPr/>
           <p:nvPr/>
         </p:nvGrpSpPr>
@@ -5475,7 +5440,7 @@
         </p:grpSpPr>
         <p:sp>
           <p:nvSpPr>
-            <p:cNvPr id="58" name="外わく"/>
+            <p:cNvPr id="57" name="外わく"/>
             <p:cNvSpPr/>
             <p:nvPr/>
           </p:nvSpPr>
@@ -5519,7 +5484,7 @@
         </p:sp>
         <p:cxnSp>
           <p:nvCxnSpPr>
-            <p:cNvPr id="59" name="マスの線 1"/>
+            <p:cNvPr id="58" name="マスの線 1"/>
             <p:cNvCxnSpPr/>
             <p:nvPr/>
           </p:nvCxnSpPr>
@@ -5555,7 +5520,7 @@
         </p:cxnSp>
         <p:cxnSp>
           <p:nvCxnSpPr>
-            <p:cNvPr id="60" name="マスの線 2"/>
+            <p:cNvPr id="59" name="マスの線 2"/>
             <p:cNvCxnSpPr/>
             <p:nvPr/>
           </p:nvCxnSpPr>
@@ -5591,7 +5556,7 @@
         </p:cxnSp>
         <p:cxnSp>
           <p:nvCxnSpPr>
-            <p:cNvPr id="61" name="マスの線 3"/>
+            <p:cNvPr id="60" name="マスの線 3"/>
             <p:cNvCxnSpPr/>
             <p:nvPr/>
           </p:nvCxnSpPr>
@@ -5627,7 +5592,7 @@
         </p:cxnSp>
         <p:cxnSp>
           <p:nvCxnSpPr>
-            <p:cNvPr id="62" name="マスの線 4"/>
+            <p:cNvPr id="61" name="マスの線 4"/>
             <p:cNvCxnSpPr/>
             <p:nvPr/>
           </p:nvCxnSpPr>
@@ -5663,7 +5628,7 @@
         </p:cxnSp>
         <p:cxnSp>
           <p:nvCxnSpPr>
-            <p:cNvPr id="63" name="マスの線 5"/>
+            <p:cNvPr id="62" name="マスの線 5"/>
             <p:cNvCxnSpPr/>
             <p:nvPr/>
           </p:nvCxnSpPr>
@@ -5699,7 +5664,7 @@
         </p:cxnSp>
         <p:cxnSp>
           <p:nvCxnSpPr>
-            <p:cNvPr id="64" name="マスの線 6"/>
+            <p:cNvPr id="63" name="マスの線 6"/>
             <p:cNvCxnSpPr/>
             <p:nvPr/>
           </p:nvCxnSpPr>
@@ -5735,7 +5700,7 @@
         </p:cxnSp>
         <p:cxnSp>
           <p:nvCxnSpPr>
-            <p:cNvPr id="65" name="マスの線 7"/>
+            <p:cNvPr id="64" name="マスの線 7"/>
             <p:cNvCxnSpPr/>
             <p:nvPr/>
           </p:nvCxnSpPr>
@@ -5771,7 +5736,7 @@
         </p:cxnSp>
         <p:cxnSp>
           <p:nvCxnSpPr>
-            <p:cNvPr id="66" name="マスの線 8"/>
+            <p:cNvPr id="65" name="マスの線 8"/>
             <p:cNvCxnSpPr/>
             <p:nvPr/>
           </p:nvCxnSpPr>
@@ -5807,7 +5772,7 @@
         </p:cxnSp>
         <p:cxnSp>
           <p:nvCxnSpPr>
-            <p:cNvPr id="67" name="マスの線 9"/>
+            <p:cNvPr id="66" name="マスの線 9"/>
             <p:cNvCxnSpPr/>
             <p:nvPr/>
           </p:nvCxnSpPr>
@@ -5843,7 +5808,7 @@
         </p:cxnSp>
         <p:cxnSp>
           <p:nvCxnSpPr>
-            <p:cNvPr id="68" name="マスの線 10"/>
+            <p:cNvPr id="67" name="マスの線 10"/>
             <p:cNvCxnSpPr/>
             <p:nvPr/>
           </p:nvCxnSpPr>
@@ -5879,7 +5844,7 @@
         </p:cxnSp>
         <p:cxnSp>
           <p:nvCxnSpPr>
-            <p:cNvPr id="69" name="マスの線 11"/>
+            <p:cNvPr id="68" name="マスの線 11"/>
             <p:cNvCxnSpPr/>
             <p:nvPr/>
           </p:nvCxnSpPr>
@@ -5916,7 +5881,7 @@
       </p:grpSp>
       <p:grpSp>
         <p:nvGrpSpPr>
-          <p:cNvPr id="70" name="6行目（右から）"/>
+          <p:cNvPr id="69" name="6行目（右から）"/>
           <p:cNvGrpSpPr/>
           <p:nvPr/>
         </p:nvGrpSpPr>
@@ -5930,7 +5895,7 @@
         </p:grpSpPr>
         <p:sp>
           <p:nvSpPr>
-            <p:cNvPr id="71" name="外わく"/>
+            <p:cNvPr id="70" name="外わく"/>
             <p:cNvSpPr/>
             <p:nvPr/>
           </p:nvSpPr>
@@ -5974,7 +5939,7 @@
         </p:sp>
         <p:cxnSp>
           <p:nvCxnSpPr>
-            <p:cNvPr id="72" name="マスの線 1"/>
+            <p:cNvPr id="71" name="マスの線 1"/>
             <p:cNvCxnSpPr/>
             <p:nvPr/>
           </p:nvCxnSpPr>
@@ -6010,7 +5975,7 @@
         </p:cxnSp>
         <p:cxnSp>
           <p:nvCxnSpPr>
-            <p:cNvPr id="73" name="マスの線 2"/>
+            <p:cNvPr id="72" name="マスの線 2"/>
             <p:cNvCxnSpPr/>
             <p:nvPr/>
           </p:nvCxnSpPr>
@@ -6046,7 +6011,7 @@
         </p:cxnSp>
         <p:cxnSp>
           <p:nvCxnSpPr>
-            <p:cNvPr id="74" name="マスの線 3"/>
+            <p:cNvPr id="73" name="マスの線 3"/>
             <p:cNvCxnSpPr/>
             <p:nvPr/>
           </p:nvCxnSpPr>
@@ -6082,7 +6047,7 @@
         </p:cxnSp>
         <p:cxnSp>
           <p:nvCxnSpPr>
-            <p:cNvPr id="75" name="マスの線 4"/>
+            <p:cNvPr id="74" name="マスの線 4"/>
             <p:cNvCxnSpPr/>
             <p:nvPr/>
           </p:nvCxnSpPr>
@@ -6118,7 +6083,7 @@
         </p:cxnSp>
         <p:cxnSp>
           <p:nvCxnSpPr>
-            <p:cNvPr id="76" name="マスの線 5"/>
+            <p:cNvPr id="75" name="マスの線 5"/>
             <p:cNvCxnSpPr/>
             <p:nvPr/>
           </p:nvCxnSpPr>
@@ -6154,7 +6119,7 @@
         </p:cxnSp>
         <p:cxnSp>
           <p:nvCxnSpPr>
-            <p:cNvPr id="77" name="マスの線 6"/>
+            <p:cNvPr id="76" name="マスの線 6"/>
             <p:cNvCxnSpPr/>
             <p:nvPr/>
           </p:nvCxnSpPr>
@@ -6190,7 +6155,7 @@
         </p:cxnSp>
         <p:cxnSp>
           <p:nvCxnSpPr>
-            <p:cNvPr id="78" name="マスの線 7"/>
+            <p:cNvPr id="77" name="マスの線 7"/>
             <p:cNvCxnSpPr/>
             <p:nvPr/>
           </p:nvCxnSpPr>
@@ -6226,7 +6191,7 @@
         </p:cxnSp>
         <p:cxnSp>
           <p:nvCxnSpPr>
-            <p:cNvPr id="79" name="マスの線 8"/>
+            <p:cNvPr id="78" name="マスの線 8"/>
             <p:cNvCxnSpPr/>
             <p:nvPr/>
           </p:nvCxnSpPr>
@@ -6262,7 +6227,7 @@
         </p:cxnSp>
         <p:cxnSp>
           <p:nvCxnSpPr>
-            <p:cNvPr id="80" name="マスの線 9"/>
+            <p:cNvPr id="79" name="マスの線 9"/>
             <p:cNvCxnSpPr/>
             <p:nvPr/>
           </p:nvCxnSpPr>
@@ -6298,7 +6263,7 @@
         </p:cxnSp>
         <p:cxnSp>
           <p:nvCxnSpPr>
-            <p:cNvPr id="81" name="マスの線 10"/>
+            <p:cNvPr id="80" name="マスの線 10"/>
             <p:cNvCxnSpPr/>
             <p:nvPr/>
           </p:nvCxnSpPr>
@@ -6334,7 +6299,7 @@
         </p:cxnSp>
         <p:cxnSp>
           <p:nvCxnSpPr>
-            <p:cNvPr id="82" name="マスの線 11"/>
+            <p:cNvPr id="81" name="マスの線 11"/>
             <p:cNvCxnSpPr/>
             <p:nvPr/>
           </p:nvCxnSpPr>
@@ -6371,7 +6336,7 @@
       </p:grpSp>
       <p:grpSp>
         <p:nvGrpSpPr>
-          <p:cNvPr id="83" name="7行目（右から）"/>
+          <p:cNvPr id="82" name="7行目（右から）"/>
           <p:cNvGrpSpPr/>
           <p:nvPr/>
         </p:nvGrpSpPr>
@@ -6385,7 +6350,7 @@
         </p:grpSpPr>
         <p:sp>
           <p:nvSpPr>
-            <p:cNvPr id="84" name="外わく"/>
+            <p:cNvPr id="83" name="外わく"/>
             <p:cNvSpPr/>
             <p:nvPr/>
           </p:nvSpPr>
@@ -6429,7 +6394,7 @@
         </p:sp>
         <p:cxnSp>
           <p:nvCxnSpPr>
-            <p:cNvPr id="85" name="マスの線 1"/>
+            <p:cNvPr id="84" name="マスの線 1"/>
             <p:cNvCxnSpPr/>
             <p:nvPr/>
           </p:nvCxnSpPr>
@@ -6465,7 +6430,7 @@
         </p:cxnSp>
         <p:cxnSp>
           <p:nvCxnSpPr>
-            <p:cNvPr id="86" name="マスの線 2"/>
+            <p:cNvPr id="85" name="マスの線 2"/>
             <p:cNvCxnSpPr/>
             <p:nvPr/>
           </p:nvCxnSpPr>
@@ -6501,7 +6466,7 @@
         </p:cxnSp>
         <p:cxnSp>
           <p:nvCxnSpPr>
-            <p:cNvPr id="87" name="マスの線 3"/>
+            <p:cNvPr id="86" name="マスの線 3"/>
             <p:cNvCxnSpPr/>
             <p:nvPr/>
           </p:nvCxnSpPr>
@@ -6537,7 +6502,7 @@
         </p:cxnSp>
         <p:cxnSp>
           <p:nvCxnSpPr>
-            <p:cNvPr id="88" name="マスの線 4"/>
+            <p:cNvPr id="87" name="マスの線 4"/>
             <p:cNvCxnSpPr/>
             <p:nvPr/>
           </p:nvCxnSpPr>
@@ -6573,7 +6538,7 @@
         </p:cxnSp>
         <p:cxnSp>
           <p:nvCxnSpPr>
-            <p:cNvPr id="89" name="マスの線 5"/>
+            <p:cNvPr id="88" name="マスの線 5"/>
             <p:cNvCxnSpPr/>
             <p:nvPr/>
           </p:nvCxnSpPr>
@@ -6609,7 +6574,7 @@
         </p:cxnSp>
         <p:cxnSp>
           <p:nvCxnSpPr>
-            <p:cNvPr id="90" name="マスの線 6"/>
+            <p:cNvPr id="89" name="マスの線 6"/>
             <p:cNvCxnSpPr/>
             <p:nvPr/>
           </p:nvCxnSpPr>
@@ -6645,7 +6610,7 @@
         </p:cxnSp>
         <p:cxnSp>
           <p:nvCxnSpPr>
-            <p:cNvPr id="91" name="マスの線 7"/>
+            <p:cNvPr id="90" name="マスの線 7"/>
             <p:cNvCxnSpPr/>
             <p:nvPr/>
           </p:nvCxnSpPr>
@@ -6681,7 +6646,7 @@
         </p:cxnSp>
         <p:cxnSp>
           <p:nvCxnSpPr>
-            <p:cNvPr id="92" name="マスの線 8"/>
+            <p:cNvPr id="91" name="マスの線 8"/>
             <p:cNvCxnSpPr/>
             <p:nvPr/>
           </p:nvCxnSpPr>
@@ -6717,7 +6682,7 @@
         </p:cxnSp>
         <p:cxnSp>
           <p:nvCxnSpPr>
-            <p:cNvPr id="93" name="マスの線 9"/>
+            <p:cNvPr id="92" name="マスの線 9"/>
             <p:cNvCxnSpPr/>
             <p:nvPr/>
           </p:nvCxnSpPr>
@@ -6753,7 +6718,7 @@
         </p:cxnSp>
         <p:cxnSp>
           <p:nvCxnSpPr>
-            <p:cNvPr id="94" name="マスの線 10"/>
+            <p:cNvPr id="93" name="マスの線 10"/>
             <p:cNvCxnSpPr/>
             <p:nvPr/>
           </p:nvCxnSpPr>
@@ -6789,7 +6754,7 @@
         </p:cxnSp>
         <p:cxnSp>
           <p:nvCxnSpPr>
-            <p:cNvPr id="95" name="マスの線 11"/>
+            <p:cNvPr id="94" name="マスの線 11"/>
             <p:cNvCxnSpPr/>
             <p:nvPr/>
           </p:nvCxnSpPr>
@@ -6826,7 +6791,7 @@
       </p:grpSp>
       <p:grpSp>
         <p:nvGrpSpPr>
-          <p:cNvPr id="96" name="8行目（右から）"/>
+          <p:cNvPr id="95" name="8行目（右から）"/>
           <p:cNvGrpSpPr/>
           <p:nvPr/>
         </p:nvGrpSpPr>
@@ -6840,7 +6805,7 @@
         </p:grpSpPr>
         <p:sp>
           <p:nvSpPr>
-            <p:cNvPr id="97" name="外わく"/>
+            <p:cNvPr id="96" name="外わく"/>
             <p:cNvSpPr/>
             <p:nvPr/>
           </p:nvSpPr>
@@ -6884,7 +6849,7 @@
         </p:sp>
         <p:cxnSp>
           <p:nvCxnSpPr>
-            <p:cNvPr id="98" name="マスの線 1"/>
+            <p:cNvPr id="97" name="マスの線 1"/>
             <p:cNvCxnSpPr/>
             <p:nvPr/>
           </p:nvCxnSpPr>
@@ -6920,7 +6885,7 @@
         </p:cxnSp>
         <p:cxnSp>
           <p:nvCxnSpPr>
-            <p:cNvPr id="99" name="マスの線 2"/>
+            <p:cNvPr id="98" name="マスの線 2"/>
             <p:cNvCxnSpPr/>
             <p:nvPr/>
           </p:nvCxnSpPr>
@@ -6956,7 +6921,7 @@
         </p:cxnSp>
         <p:cxnSp>
           <p:nvCxnSpPr>
-            <p:cNvPr id="100" name="マスの線 3"/>
+            <p:cNvPr id="99" name="マスの線 3"/>
             <p:cNvCxnSpPr/>
             <p:nvPr/>
           </p:nvCxnSpPr>
@@ -6992,7 +6957,7 @@
         </p:cxnSp>
         <p:cxnSp>
           <p:nvCxnSpPr>
-            <p:cNvPr id="101" name="マスの線 4"/>
+            <p:cNvPr id="100" name="マスの線 4"/>
             <p:cNvCxnSpPr/>
             <p:nvPr/>
           </p:nvCxnSpPr>
@@ -7028,7 +6993,7 @@
         </p:cxnSp>
         <p:cxnSp>
           <p:nvCxnSpPr>
-            <p:cNvPr id="102" name="マスの線 5"/>
+            <p:cNvPr id="101" name="マスの線 5"/>
             <p:cNvCxnSpPr/>
             <p:nvPr/>
           </p:nvCxnSpPr>
@@ -7064,7 +7029,7 @@
         </p:cxnSp>
         <p:cxnSp>
           <p:nvCxnSpPr>
-            <p:cNvPr id="103" name="マスの線 6"/>
+            <p:cNvPr id="102" name="マスの線 6"/>
             <p:cNvCxnSpPr/>
             <p:nvPr/>
           </p:nvCxnSpPr>
@@ -7100,7 +7065,7 @@
         </p:cxnSp>
         <p:cxnSp>
           <p:nvCxnSpPr>
-            <p:cNvPr id="104" name="マスの線 7"/>
+            <p:cNvPr id="103" name="マスの線 7"/>
             <p:cNvCxnSpPr/>
             <p:nvPr/>
           </p:nvCxnSpPr>
@@ -7136,7 +7101,7 @@
         </p:cxnSp>
         <p:cxnSp>
           <p:nvCxnSpPr>
-            <p:cNvPr id="105" name="マスの線 8"/>
+            <p:cNvPr id="104" name="マスの線 8"/>
             <p:cNvCxnSpPr/>
             <p:nvPr/>
           </p:nvCxnSpPr>
@@ -7172,7 +7137,7 @@
         </p:cxnSp>
         <p:cxnSp>
           <p:nvCxnSpPr>
-            <p:cNvPr id="106" name="マスの線 9"/>
+            <p:cNvPr id="105" name="マスの線 9"/>
             <p:cNvCxnSpPr/>
             <p:nvPr/>
           </p:nvCxnSpPr>
@@ -7208,7 +7173,7 @@
         </p:cxnSp>
         <p:cxnSp>
           <p:nvCxnSpPr>
-            <p:cNvPr id="107" name="マスの線 10"/>
+            <p:cNvPr id="106" name="マスの線 10"/>
             <p:cNvCxnSpPr/>
             <p:nvPr/>
           </p:nvCxnSpPr>
@@ -7244,7 +7209,7 @@
         </p:cxnSp>
         <p:cxnSp>
           <p:nvCxnSpPr>
-            <p:cNvPr id="108" name="マスの線 11"/>
+            <p:cNvPr id="107" name="マスの線 11"/>
             <p:cNvCxnSpPr/>
             <p:nvPr/>
           </p:nvCxnSpPr>
@@ -7281,7 +7246,7 @@
       </p:grpSp>
       <p:pic>
         <p:nvPicPr>
-          <p:cNvPr id="109" name="さし絵（消してもかまいません）" descr="_tmp_ill.png"/>
+          <p:cNvPr id="108" name="さし絵（消してもかまいません）" descr="_tmp_ill.png"/>
           <p:cNvPicPr>
             <a:picLocks noChangeAspect="1"/>
           </p:cNvPicPr>
@@ -7305,7 +7270,7 @@
       </p:pic>
       <p:sp>
         <p:nvSpPr>
-          <p:cNvPr id="110" name="紙の説明（消してもかまいません）"/>
+          <p:cNvPr id="109" name="紙の説明（消してもかまいません）"/>
           <p:cNvSpPr txBox="1"/>
           <p:nvPr/>
         </p:nvSpPr>
@@ -7340,7 +7305,7 @@
       </p:sp>
       <p:sp>
         <p:nvSpPr>
-          <p:cNvPr id="111" name="クレジット"/>
+          <p:cNvPr id="110" name="クレジット"/>
           <p:cNvSpPr txBox="1"/>
           <p:nvPr/>
         </p:nvSpPr>
